--- a/presentation/global.pptx
+++ b/presentation/global.pptx
@@ -23,23 +23,16 @@
   <p:notesSz cx="6858000" cy="9144000"/>
   <p:embeddedFontLst>
     <p:embeddedFont>
-      <p:font typeface="Arimo Bold" charset="0"/>
+      <p:font typeface="Arimo Bold" panose="020B0604020202020204" charset="0"/>
       <p:regular r:id="rId13"/>
     </p:embeddedFont>
     <p:embeddedFont>
-      <p:font typeface="Open Sans" charset="0"/>
+      <p:font typeface="Open Sans" panose="020F0502020204030204" pitchFamily="34" charset="0"/>
       <p:regular r:id="rId14"/>
     </p:embeddedFont>
     <p:embeddedFont>
-      <p:font typeface="Open Sans Bold" charset="0"/>
+      <p:font typeface="Open Sans Bold" panose="020B0604020202020204" charset="0"/>
       <p:regular r:id="rId15"/>
-    </p:embeddedFont>
-    <p:embeddedFont>
-      <p:font typeface="Calibri" pitchFamily="34" charset="0"/>
-      <p:regular r:id="rId16"/>
-      <p:bold r:id="rId17"/>
-      <p:italic r:id="rId18"/>
-      <p:boldItalic r:id="rId19"/>
     </p:embeddedFont>
   </p:embeddedFontLst>
   <p:defaultTextStyle>
@@ -137,6 +130,22 @@
       </a:defRPr>
     </a:lvl9pPr>
   </p:defaultTextStyle>
+  <p:extLst>
+    <p:ext uri="{EFAFB233-063F-42B5-8137-9DF3F51BA10A}">
+      <p15:sldGuideLst xmlns:p15="http://schemas.microsoft.com/office/powerpoint/2012/main">
+        <p15:guide id="1" orient="horz" pos="2160">
+          <p15:clr>
+            <a:srgbClr val="A4A3A4"/>
+          </p15:clr>
+        </p15:guide>
+        <p15:guide id="2" pos="2880">
+          <p15:clr>
+            <a:srgbClr val="A4A3A4"/>
+          </p15:clr>
+        </p15:guide>
+      </p15:sldGuideLst>
+    </p:ext>
+  </p:extLst>
 </p:presentation>
 </file>
 
@@ -222,7 +231,6 @@
           <a:p>
             <a:fld id="{B7268E1E-0E44-426D-905E-8AD9B19D2182}" type="datetimeFigureOut">
               <a:rPr lang="cs-CZ" smtClean="0"/>
-              <a:pPr/>
               <a:t>22.08.2026</a:t>
             </a:fld>
             <a:endParaRPr lang="cs-CZ"/>
@@ -287,35 +295,35 @@
           <a:p>
             <a:pPr lvl="0"/>
             <a:r>
-              <a:rPr lang="en-US" smtClean="0"/>
+              <a:rPr lang="en-US"/>
               <a:t>Click to edit Master text styles</a:t>
             </a:r>
           </a:p>
           <a:p>
             <a:pPr lvl="1"/>
             <a:r>
-              <a:rPr lang="en-US" smtClean="0"/>
+              <a:rPr lang="en-US"/>
               <a:t>Second level</a:t>
             </a:r>
           </a:p>
           <a:p>
             <a:pPr lvl="2"/>
             <a:r>
-              <a:rPr lang="en-US" smtClean="0"/>
+              <a:rPr lang="en-US"/>
               <a:t>Third level</a:t>
             </a:r>
           </a:p>
           <a:p>
             <a:pPr lvl="3"/>
             <a:r>
-              <a:rPr lang="en-US" smtClean="0"/>
+              <a:rPr lang="en-US"/>
               <a:t>Fourth level</a:t>
             </a:r>
           </a:p>
           <a:p>
             <a:pPr lvl="4"/>
             <a:r>
-              <a:rPr lang="en-US" smtClean="0"/>
+              <a:rPr lang="en-US"/>
               <a:t>Fifth level</a:t>
             </a:r>
             <a:endParaRPr lang="cs-CZ"/>
@@ -382,7 +390,6 @@
           <a:p>
             <a:fld id="{871B2431-D351-4C6E-A3CF-9DFAC0E3E050}" type="slidenum">
               <a:rPr lang="cs-CZ" smtClean="0"/>
-              <a:pPr/>
               <a:t>‹#›</a:t>
             </a:fld>
             <a:endParaRPr lang="cs-CZ"/>
@@ -392,7 +399,7 @@
     </p:spTree>
     <p:extLst>
       <p:ext uri="{BB962C8B-B14F-4D97-AF65-F5344CB8AC3E}">
-        <p14:creationId xmlns:p14="http://schemas.microsoft.com/office/powerpoint/2010/main" xmlns="" val="1798889115"/>
+        <p14:creationId xmlns:p14="http://schemas.microsoft.com/office/powerpoint/2010/main" val="1798889115"/>
       </p:ext>
     </p:extLst>
   </p:cSld>
@@ -509,6 +516,199 @@
           <a:chExt cx="0" cy="0"/>
         </a:xfrm>
       </p:grpSpPr>
+      <p:sp>
+        <p:nvSpPr>
+          <p:cNvPr id="2" name="Header Placeholder 1"/>
+          <p:cNvSpPr>
+            <a:spLocks noGrp="1"/>
+          </p:cNvSpPr>
+          <p:nvPr>
+            <p:ph type="hdr" sz="quarter"/>
+          </p:nvPr>
+        </p:nvSpPr>
+        <p:spPr>
+          <a:xfrm>
+            <a:off x="0" y="0"/>
+            <a:ext cx="3962400" cy="342900"/>
+          </a:xfrm>
+          <a:prstGeom prst="rect">
+            <a:avLst/>
+          </a:prstGeom>
+        </p:spPr>
+        <p:txBody>
+          <a:bodyPr vert="horz" lIns="91440" tIns="45720" rIns="91440" bIns="45720" rtlCol="0"/>
+          <a:lstStyle>
+            <a:lvl1pPr algn="l">
+              <a:defRPr sz="1200"/>
+            </a:lvl1pPr>
+          </a:lstStyle>
+          <a:p>
+            <a:endParaRPr/>
+          </a:p>
+        </p:txBody>
+      </p:sp>
+      <p:sp>
+        <p:nvSpPr>
+          <p:cNvPr id="3" name="Date Placeholder 2"/>
+          <p:cNvSpPr>
+            <a:spLocks noGrp="1"/>
+          </p:cNvSpPr>
+          <p:nvPr>
+            <p:ph type="dt" idx="1"/>
+          </p:nvPr>
+        </p:nvSpPr>
+        <p:spPr>
+          <a:xfrm>
+            <a:off x="5180013" y="0"/>
+            <a:ext cx="3962400" cy="342900"/>
+          </a:xfrm>
+          <a:prstGeom prst="rect">
+            <a:avLst/>
+          </a:prstGeom>
+        </p:spPr>
+        <p:txBody>
+          <a:bodyPr vert="horz" lIns="91440" tIns="45720" rIns="91440" bIns="45720" rtlCol="0"/>
+          <a:lstStyle>
+            <a:lvl1pPr algn="r">
+              <a:defRPr sz="1200"/>
+            </a:lvl1pPr>
+          </a:lstStyle>
+          <a:p>
+            <a:r>
+              <a:rPr lang="cs-CZ"/>
+              <a:t>1.7.2013</a:t>
+            </a:r>
+          </a:p>
+        </p:txBody>
+      </p:sp>
+      <p:sp>
+        <p:nvSpPr>
+          <p:cNvPr id="4" name="Slide Image Placeholder 3"/>
+          <p:cNvSpPr>
+            <a:spLocks noGrp="1" noRot="1" noChangeAspect="1"/>
+          </p:cNvSpPr>
+          <p:nvPr>
+            <p:ph type="sldImg" idx="2"/>
+          </p:nvPr>
+        </p:nvSpPr>
+        <p:spPr>
+          <a:xfrm>
+            <a:off x="2857500" y="512763"/>
+            <a:ext cx="3429000" cy="2566987"/>
+          </a:xfrm>
+          <a:prstGeom prst="rect">
+            <a:avLst/>
+          </a:prstGeom>
+          <a:noFill/>
+          <a:ln w="12700">
+            <a:solidFill>
+              <a:prstClr val="black"/>
+            </a:solidFill>
+          </a:ln>
+        </p:spPr>
+        <p:txBody>
+          <a:bodyPr vert="horz" lIns="91440" tIns="45720" rIns="91440" bIns="45720" rtlCol="0" anchor="ctr"/>
+          <a:lstStyle/>
+          <a:p>
+            <a:endParaRPr/>
+          </a:p>
+        </p:txBody>
+      </p:sp>
+      <p:sp>
+        <p:nvSpPr>
+          <p:cNvPr id="5" name="Notes Placeholder 4"/>
+          <p:cNvSpPr>
+            <a:spLocks noGrp="1"/>
+          </p:cNvSpPr>
+          <p:nvPr>
+            <p:ph type="body" sz="quarter" idx="3"/>
+          </p:nvPr>
+        </p:nvSpPr>
+        <p:spPr>
+          <a:xfrm>
+            <a:off x="914400" y="3251200"/>
+            <a:ext cx="7315200" cy="3081338"/>
+          </a:xfrm>
+          <a:prstGeom prst="rect">
+            <a:avLst/>
+          </a:prstGeom>
+        </p:spPr>
+        <p:txBody>
+          <a:bodyPr vert="horz" lIns="91440" tIns="45720" rIns="91440" bIns="45720" rtlCol="0"/>
+          <a:lstStyle/>
+          <a:p>
+            <a:r>
+              <a:rPr lang="en-US"/>
+              <a:t>1</a:t>
+            </a:r>
+          </a:p>
+        </p:txBody>
+      </p:sp>
+      <p:sp>
+        <p:nvSpPr>
+          <p:cNvPr id="6" name="Footer Placeholder 5"/>
+          <p:cNvSpPr>
+            <a:spLocks noGrp="1"/>
+          </p:cNvSpPr>
+          <p:nvPr>
+            <p:ph type="ftr" sz="quarter" idx="4"/>
+          </p:nvPr>
+        </p:nvSpPr>
+        <p:spPr>
+          <a:xfrm>
+            <a:off x="0" y="6502400"/>
+            <a:ext cx="3962400" cy="341313"/>
+          </a:xfrm>
+          <a:prstGeom prst="rect">
+            <a:avLst/>
+          </a:prstGeom>
+        </p:spPr>
+        <p:txBody>
+          <a:bodyPr vert="horz" lIns="91440" tIns="45720" rIns="91440" bIns="45720" rtlCol="0" anchor="b"/>
+          <a:lstStyle>
+            <a:lvl1pPr algn="l">
+              <a:defRPr sz="1200"/>
+            </a:lvl1pPr>
+          </a:lstStyle>
+          <a:p>
+            <a:endParaRPr/>
+          </a:p>
+        </p:txBody>
+      </p:sp>
+      <p:sp>
+        <p:nvSpPr>
+          <p:cNvPr id="7" name="Slide Number Placeholder 6"/>
+          <p:cNvSpPr>
+            <a:spLocks noGrp="1"/>
+          </p:cNvSpPr>
+          <p:nvPr>
+            <p:ph type="sldNum" sz="quarter" idx="5"/>
+          </p:nvPr>
+        </p:nvSpPr>
+        <p:spPr>
+          <a:xfrm>
+            <a:off x="5180013" y="6502400"/>
+            <a:ext cx="3962400" cy="341313"/>
+          </a:xfrm>
+          <a:prstGeom prst="rect">
+            <a:avLst/>
+          </a:prstGeom>
+        </p:spPr>
+        <p:txBody>
+          <a:bodyPr vert="horz" lIns="91440" tIns="45720" rIns="91440" bIns="45720" rtlCol="0" anchor="b"/>
+          <a:lstStyle>
+            <a:lvl1pPr algn="r">
+              <a:defRPr sz="1200"/>
+            </a:lvl1pPr>
+          </a:lstStyle>
+          <a:p>
+            <a:r>
+              <a:rPr lang="cs-CZ"/>
+              <a:t>‹#›</a:t>
+            </a:r>
+          </a:p>
+        </p:txBody>
+      </p:sp>
     </p:spTree>
   </p:cSld>
   <p:clrMapOvr>
@@ -534,6 +734,199 @@
           <a:chExt cx="0" cy="0"/>
         </a:xfrm>
       </p:grpSpPr>
+      <p:sp>
+        <p:nvSpPr>
+          <p:cNvPr id="2" name="Header Placeholder 1"/>
+          <p:cNvSpPr>
+            <a:spLocks noGrp="1"/>
+          </p:cNvSpPr>
+          <p:nvPr>
+            <p:ph type="hdr" sz="quarter"/>
+          </p:nvPr>
+        </p:nvSpPr>
+        <p:spPr>
+          <a:xfrm>
+            <a:off x="0" y="0"/>
+            <a:ext cx="3962400" cy="342900"/>
+          </a:xfrm>
+          <a:prstGeom prst="rect">
+            <a:avLst/>
+          </a:prstGeom>
+        </p:spPr>
+        <p:txBody>
+          <a:bodyPr vert="horz" lIns="91440" tIns="45720" rIns="91440" bIns="45720" rtlCol="0"/>
+          <a:lstStyle>
+            <a:lvl1pPr algn="l">
+              <a:defRPr sz="1200"/>
+            </a:lvl1pPr>
+          </a:lstStyle>
+          <a:p>
+            <a:endParaRPr/>
+          </a:p>
+        </p:txBody>
+      </p:sp>
+      <p:sp>
+        <p:nvSpPr>
+          <p:cNvPr id="3" name="Date Placeholder 2"/>
+          <p:cNvSpPr>
+            <a:spLocks noGrp="1"/>
+          </p:cNvSpPr>
+          <p:nvPr>
+            <p:ph type="dt" idx="1"/>
+          </p:nvPr>
+        </p:nvSpPr>
+        <p:spPr>
+          <a:xfrm>
+            <a:off x="5180013" y="0"/>
+            <a:ext cx="3962400" cy="342900"/>
+          </a:xfrm>
+          <a:prstGeom prst="rect">
+            <a:avLst/>
+          </a:prstGeom>
+        </p:spPr>
+        <p:txBody>
+          <a:bodyPr vert="horz" lIns="91440" tIns="45720" rIns="91440" bIns="45720" rtlCol="0"/>
+          <a:lstStyle>
+            <a:lvl1pPr algn="r">
+              <a:defRPr sz="1200"/>
+            </a:lvl1pPr>
+          </a:lstStyle>
+          <a:p>
+            <a:r>
+              <a:rPr lang="cs-CZ"/>
+              <a:t>1.7.2013</a:t>
+            </a:r>
+          </a:p>
+        </p:txBody>
+      </p:sp>
+      <p:sp>
+        <p:nvSpPr>
+          <p:cNvPr id="4" name="Slide Image Placeholder 3"/>
+          <p:cNvSpPr>
+            <a:spLocks noGrp="1" noRot="1" noChangeAspect="1"/>
+          </p:cNvSpPr>
+          <p:nvPr>
+            <p:ph type="sldImg" idx="2"/>
+          </p:nvPr>
+        </p:nvSpPr>
+        <p:spPr>
+          <a:xfrm>
+            <a:off x="2857500" y="512763"/>
+            <a:ext cx="3429000" cy="2566987"/>
+          </a:xfrm>
+          <a:prstGeom prst="rect">
+            <a:avLst/>
+          </a:prstGeom>
+          <a:noFill/>
+          <a:ln w="12700">
+            <a:solidFill>
+              <a:prstClr val="black"/>
+            </a:solidFill>
+          </a:ln>
+        </p:spPr>
+        <p:txBody>
+          <a:bodyPr vert="horz" lIns="91440" tIns="45720" rIns="91440" bIns="45720" rtlCol="0" anchor="ctr"/>
+          <a:lstStyle/>
+          <a:p>
+            <a:endParaRPr/>
+          </a:p>
+        </p:txBody>
+      </p:sp>
+      <p:sp>
+        <p:nvSpPr>
+          <p:cNvPr id="5" name="Notes Placeholder 4"/>
+          <p:cNvSpPr>
+            <a:spLocks noGrp="1"/>
+          </p:cNvSpPr>
+          <p:nvPr>
+            <p:ph type="body" sz="quarter" idx="3"/>
+          </p:nvPr>
+        </p:nvSpPr>
+        <p:spPr>
+          <a:xfrm>
+            <a:off x="914400" y="3251200"/>
+            <a:ext cx="7315200" cy="3081338"/>
+          </a:xfrm>
+          <a:prstGeom prst="rect">
+            <a:avLst/>
+          </a:prstGeom>
+        </p:spPr>
+        <p:txBody>
+          <a:bodyPr vert="horz" lIns="91440" tIns="45720" rIns="91440" bIns="45720" rtlCol="0"/>
+          <a:lstStyle/>
+          <a:p>
+            <a:r>
+              <a:rPr lang="en-US"/>
+              <a:t>10</a:t>
+            </a:r>
+          </a:p>
+        </p:txBody>
+      </p:sp>
+      <p:sp>
+        <p:nvSpPr>
+          <p:cNvPr id="6" name="Footer Placeholder 5"/>
+          <p:cNvSpPr>
+            <a:spLocks noGrp="1"/>
+          </p:cNvSpPr>
+          <p:nvPr>
+            <p:ph type="ftr" sz="quarter" idx="4"/>
+          </p:nvPr>
+        </p:nvSpPr>
+        <p:spPr>
+          <a:xfrm>
+            <a:off x="0" y="6502400"/>
+            <a:ext cx="3962400" cy="341313"/>
+          </a:xfrm>
+          <a:prstGeom prst="rect">
+            <a:avLst/>
+          </a:prstGeom>
+        </p:spPr>
+        <p:txBody>
+          <a:bodyPr vert="horz" lIns="91440" tIns="45720" rIns="91440" bIns="45720" rtlCol="0" anchor="b"/>
+          <a:lstStyle>
+            <a:lvl1pPr algn="l">
+              <a:defRPr sz="1200"/>
+            </a:lvl1pPr>
+          </a:lstStyle>
+          <a:p>
+            <a:endParaRPr/>
+          </a:p>
+        </p:txBody>
+      </p:sp>
+      <p:sp>
+        <p:nvSpPr>
+          <p:cNvPr id="7" name="Slide Number Placeholder 6"/>
+          <p:cNvSpPr>
+            <a:spLocks noGrp="1"/>
+          </p:cNvSpPr>
+          <p:nvPr>
+            <p:ph type="sldNum" sz="quarter" idx="5"/>
+          </p:nvPr>
+        </p:nvSpPr>
+        <p:spPr>
+          <a:xfrm>
+            <a:off x="5180013" y="6502400"/>
+            <a:ext cx="3962400" cy="341313"/>
+          </a:xfrm>
+          <a:prstGeom prst="rect">
+            <a:avLst/>
+          </a:prstGeom>
+        </p:spPr>
+        <p:txBody>
+          <a:bodyPr vert="horz" lIns="91440" tIns="45720" rIns="91440" bIns="45720" rtlCol="0" anchor="b"/>
+          <a:lstStyle>
+            <a:lvl1pPr algn="r">
+              <a:defRPr sz="1200"/>
+            </a:lvl1pPr>
+          </a:lstStyle>
+          <a:p>
+            <a:r>
+              <a:rPr lang="cs-CZ"/>
+              <a:t>‹#›</a:t>
+            </a:r>
+          </a:p>
+        </p:txBody>
+      </p:sp>
     </p:spTree>
   </p:cSld>
   <p:clrMapOvr>
@@ -559,6 +952,199 @@
           <a:chExt cx="0" cy="0"/>
         </a:xfrm>
       </p:grpSpPr>
+      <p:sp>
+        <p:nvSpPr>
+          <p:cNvPr id="2" name="Header Placeholder 1"/>
+          <p:cNvSpPr>
+            <a:spLocks noGrp="1"/>
+          </p:cNvSpPr>
+          <p:nvPr>
+            <p:ph type="hdr" sz="quarter"/>
+          </p:nvPr>
+        </p:nvSpPr>
+        <p:spPr>
+          <a:xfrm>
+            <a:off x="0" y="0"/>
+            <a:ext cx="3962400" cy="342900"/>
+          </a:xfrm>
+          <a:prstGeom prst="rect">
+            <a:avLst/>
+          </a:prstGeom>
+        </p:spPr>
+        <p:txBody>
+          <a:bodyPr vert="horz" lIns="91440" tIns="45720" rIns="91440" bIns="45720" rtlCol="0"/>
+          <a:lstStyle>
+            <a:lvl1pPr algn="l">
+              <a:defRPr sz="1200"/>
+            </a:lvl1pPr>
+          </a:lstStyle>
+          <a:p>
+            <a:endParaRPr/>
+          </a:p>
+        </p:txBody>
+      </p:sp>
+      <p:sp>
+        <p:nvSpPr>
+          <p:cNvPr id="3" name="Date Placeholder 2"/>
+          <p:cNvSpPr>
+            <a:spLocks noGrp="1"/>
+          </p:cNvSpPr>
+          <p:nvPr>
+            <p:ph type="dt" idx="1"/>
+          </p:nvPr>
+        </p:nvSpPr>
+        <p:spPr>
+          <a:xfrm>
+            <a:off x="5180013" y="0"/>
+            <a:ext cx="3962400" cy="342900"/>
+          </a:xfrm>
+          <a:prstGeom prst="rect">
+            <a:avLst/>
+          </a:prstGeom>
+        </p:spPr>
+        <p:txBody>
+          <a:bodyPr vert="horz" lIns="91440" tIns="45720" rIns="91440" bIns="45720" rtlCol="0"/>
+          <a:lstStyle>
+            <a:lvl1pPr algn="r">
+              <a:defRPr sz="1200"/>
+            </a:lvl1pPr>
+          </a:lstStyle>
+          <a:p>
+            <a:r>
+              <a:rPr lang="cs-CZ"/>
+              <a:t>1.7.2013</a:t>
+            </a:r>
+          </a:p>
+        </p:txBody>
+      </p:sp>
+      <p:sp>
+        <p:nvSpPr>
+          <p:cNvPr id="4" name="Slide Image Placeholder 3"/>
+          <p:cNvSpPr>
+            <a:spLocks noGrp="1" noRot="1" noChangeAspect="1"/>
+          </p:cNvSpPr>
+          <p:nvPr>
+            <p:ph type="sldImg" idx="2"/>
+          </p:nvPr>
+        </p:nvSpPr>
+        <p:spPr>
+          <a:xfrm>
+            <a:off x="2857500" y="512763"/>
+            <a:ext cx="3429000" cy="2566987"/>
+          </a:xfrm>
+          <a:prstGeom prst="rect">
+            <a:avLst/>
+          </a:prstGeom>
+          <a:noFill/>
+          <a:ln w="12700">
+            <a:solidFill>
+              <a:prstClr val="black"/>
+            </a:solidFill>
+          </a:ln>
+        </p:spPr>
+        <p:txBody>
+          <a:bodyPr vert="horz" lIns="91440" tIns="45720" rIns="91440" bIns="45720" rtlCol="0" anchor="ctr"/>
+          <a:lstStyle/>
+          <a:p>
+            <a:endParaRPr/>
+          </a:p>
+        </p:txBody>
+      </p:sp>
+      <p:sp>
+        <p:nvSpPr>
+          <p:cNvPr id="5" name="Notes Placeholder 4"/>
+          <p:cNvSpPr>
+            <a:spLocks noGrp="1"/>
+          </p:cNvSpPr>
+          <p:nvPr>
+            <p:ph type="body" sz="quarter" idx="3"/>
+          </p:nvPr>
+        </p:nvSpPr>
+        <p:spPr>
+          <a:xfrm>
+            <a:off x="914400" y="3251200"/>
+            <a:ext cx="7315200" cy="3081338"/>
+          </a:xfrm>
+          <a:prstGeom prst="rect">
+            <a:avLst/>
+          </a:prstGeom>
+        </p:spPr>
+        <p:txBody>
+          <a:bodyPr vert="horz" lIns="91440" tIns="45720" rIns="91440" bIns="45720" rtlCol="0"/>
+          <a:lstStyle/>
+          <a:p>
+            <a:r>
+              <a:rPr lang="en-US"/>
+              <a:t>2</a:t>
+            </a:r>
+          </a:p>
+        </p:txBody>
+      </p:sp>
+      <p:sp>
+        <p:nvSpPr>
+          <p:cNvPr id="6" name="Footer Placeholder 5"/>
+          <p:cNvSpPr>
+            <a:spLocks noGrp="1"/>
+          </p:cNvSpPr>
+          <p:nvPr>
+            <p:ph type="ftr" sz="quarter" idx="4"/>
+          </p:nvPr>
+        </p:nvSpPr>
+        <p:spPr>
+          <a:xfrm>
+            <a:off x="0" y="6502400"/>
+            <a:ext cx="3962400" cy="341313"/>
+          </a:xfrm>
+          <a:prstGeom prst="rect">
+            <a:avLst/>
+          </a:prstGeom>
+        </p:spPr>
+        <p:txBody>
+          <a:bodyPr vert="horz" lIns="91440" tIns="45720" rIns="91440" bIns="45720" rtlCol="0" anchor="b"/>
+          <a:lstStyle>
+            <a:lvl1pPr algn="l">
+              <a:defRPr sz="1200"/>
+            </a:lvl1pPr>
+          </a:lstStyle>
+          <a:p>
+            <a:endParaRPr/>
+          </a:p>
+        </p:txBody>
+      </p:sp>
+      <p:sp>
+        <p:nvSpPr>
+          <p:cNvPr id="7" name="Slide Number Placeholder 6"/>
+          <p:cNvSpPr>
+            <a:spLocks noGrp="1"/>
+          </p:cNvSpPr>
+          <p:nvPr>
+            <p:ph type="sldNum" sz="quarter" idx="5"/>
+          </p:nvPr>
+        </p:nvSpPr>
+        <p:spPr>
+          <a:xfrm>
+            <a:off x="5180013" y="6502400"/>
+            <a:ext cx="3962400" cy="341313"/>
+          </a:xfrm>
+          <a:prstGeom prst="rect">
+            <a:avLst/>
+          </a:prstGeom>
+        </p:spPr>
+        <p:txBody>
+          <a:bodyPr vert="horz" lIns="91440" tIns="45720" rIns="91440" bIns="45720" rtlCol="0" anchor="b"/>
+          <a:lstStyle>
+            <a:lvl1pPr algn="r">
+              <a:defRPr sz="1200"/>
+            </a:lvl1pPr>
+          </a:lstStyle>
+          <a:p>
+            <a:r>
+              <a:rPr lang="cs-CZ"/>
+              <a:t>‹#›</a:t>
+            </a:r>
+          </a:p>
+        </p:txBody>
+      </p:sp>
     </p:spTree>
   </p:cSld>
   <p:clrMapOvr>
@@ -584,6 +1170,199 @@
           <a:chExt cx="0" cy="0"/>
         </a:xfrm>
       </p:grpSpPr>
+      <p:sp>
+        <p:nvSpPr>
+          <p:cNvPr id="2" name="Header Placeholder 1"/>
+          <p:cNvSpPr>
+            <a:spLocks noGrp="1"/>
+          </p:cNvSpPr>
+          <p:nvPr>
+            <p:ph type="hdr" sz="quarter"/>
+          </p:nvPr>
+        </p:nvSpPr>
+        <p:spPr>
+          <a:xfrm>
+            <a:off x="0" y="0"/>
+            <a:ext cx="3962400" cy="342900"/>
+          </a:xfrm>
+          <a:prstGeom prst="rect">
+            <a:avLst/>
+          </a:prstGeom>
+        </p:spPr>
+        <p:txBody>
+          <a:bodyPr vert="horz" lIns="91440" tIns="45720" rIns="91440" bIns="45720" rtlCol="0"/>
+          <a:lstStyle>
+            <a:lvl1pPr algn="l">
+              <a:defRPr sz="1200"/>
+            </a:lvl1pPr>
+          </a:lstStyle>
+          <a:p>
+            <a:endParaRPr/>
+          </a:p>
+        </p:txBody>
+      </p:sp>
+      <p:sp>
+        <p:nvSpPr>
+          <p:cNvPr id="3" name="Date Placeholder 2"/>
+          <p:cNvSpPr>
+            <a:spLocks noGrp="1"/>
+          </p:cNvSpPr>
+          <p:nvPr>
+            <p:ph type="dt" idx="1"/>
+          </p:nvPr>
+        </p:nvSpPr>
+        <p:spPr>
+          <a:xfrm>
+            <a:off x="5180013" y="0"/>
+            <a:ext cx="3962400" cy="342900"/>
+          </a:xfrm>
+          <a:prstGeom prst="rect">
+            <a:avLst/>
+          </a:prstGeom>
+        </p:spPr>
+        <p:txBody>
+          <a:bodyPr vert="horz" lIns="91440" tIns="45720" rIns="91440" bIns="45720" rtlCol="0"/>
+          <a:lstStyle>
+            <a:lvl1pPr algn="r">
+              <a:defRPr sz="1200"/>
+            </a:lvl1pPr>
+          </a:lstStyle>
+          <a:p>
+            <a:r>
+              <a:rPr lang="cs-CZ"/>
+              <a:t>1.7.2013</a:t>
+            </a:r>
+          </a:p>
+        </p:txBody>
+      </p:sp>
+      <p:sp>
+        <p:nvSpPr>
+          <p:cNvPr id="4" name="Slide Image Placeholder 3"/>
+          <p:cNvSpPr>
+            <a:spLocks noGrp="1" noRot="1" noChangeAspect="1"/>
+          </p:cNvSpPr>
+          <p:nvPr>
+            <p:ph type="sldImg" idx="2"/>
+          </p:nvPr>
+        </p:nvSpPr>
+        <p:spPr>
+          <a:xfrm>
+            <a:off x="2857500" y="512763"/>
+            <a:ext cx="3429000" cy="2566987"/>
+          </a:xfrm>
+          <a:prstGeom prst="rect">
+            <a:avLst/>
+          </a:prstGeom>
+          <a:noFill/>
+          <a:ln w="12700">
+            <a:solidFill>
+              <a:prstClr val="black"/>
+            </a:solidFill>
+          </a:ln>
+        </p:spPr>
+        <p:txBody>
+          <a:bodyPr vert="horz" lIns="91440" tIns="45720" rIns="91440" bIns="45720" rtlCol="0" anchor="ctr"/>
+          <a:lstStyle/>
+          <a:p>
+            <a:endParaRPr/>
+          </a:p>
+        </p:txBody>
+      </p:sp>
+      <p:sp>
+        <p:nvSpPr>
+          <p:cNvPr id="5" name="Notes Placeholder 4"/>
+          <p:cNvSpPr>
+            <a:spLocks noGrp="1"/>
+          </p:cNvSpPr>
+          <p:nvPr>
+            <p:ph type="body" sz="quarter" idx="3"/>
+          </p:nvPr>
+        </p:nvSpPr>
+        <p:spPr>
+          <a:xfrm>
+            <a:off x="914400" y="3251200"/>
+            <a:ext cx="7315200" cy="3081338"/>
+          </a:xfrm>
+          <a:prstGeom prst="rect">
+            <a:avLst/>
+          </a:prstGeom>
+        </p:spPr>
+        <p:txBody>
+          <a:bodyPr vert="horz" lIns="91440" tIns="45720" rIns="91440" bIns="45720" rtlCol="0"/>
+          <a:lstStyle/>
+          <a:p>
+            <a:r>
+              <a:rPr lang="en-US"/>
+              <a:t>3</a:t>
+            </a:r>
+          </a:p>
+        </p:txBody>
+      </p:sp>
+      <p:sp>
+        <p:nvSpPr>
+          <p:cNvPr id="6" name="Footer Placeholder 5"/>
+          <p:cNvSpPr>
+            <a:spLocks noGrp="1"/>
+          </p:cNvSpPr>
+          <p:nvPr>
+            <p:ph type="ftr" sz="quarter" idx="4"/>
+          </p:nvPr>
+        </p:nvSpPr>
+        <p:spPr>
+          <a:xfrm>
+            <a:off x="0" y="6502400"/>
+            <a:ext cx="3962400" cy="341313"/>
+          </a:xfrm>
+          <a:prstGeom prst="rect">
+            <a:avLst/>
+          </a:prstGeom>
+        </p:spPr>
+        <p:txBody>
+          <a:bodyPr vert="horz" lIns="91440" tIns="45720" rIns="91440" bIns="45720" rtlCol="0" anchor="b"/>
+          <a:lstStyle>
+            <a:lvl1pPr algn="l">
+              <a:defRPr sz="1200"/>
+            </a:lvl1pPr>
+          </a:lstStyle>
+          <a:p>
+            <a:endParaRPr/>
+          </a:p>
+        </p:txBody>
+      </p:sp>
+      <p:sp>
+        <p:nvSpPr>
+          <p:cNvPr id="7" name="Slide Number Placeholder 6"/>
+          <p:cNvSpPr>
+            <a:spLocks noGrp="1"/>
+          </p:cNvSpPr>
+          <p:nvPr>
+            <p:ph type="sldNum" sz="quarter" idx="5"/>
+          </p:nvPr>
+        </p:nvSpPr>
+        <p:spPr>
+          <a:xfrm>
+            <a:off x="5180013" y="6502400"/>
+            <a:ext cx="3962400" cy="341313"/>
+          </a:xfrm>
+          <a:prstGeom prst="rect">
+            <a:avLst/>
+          </a:prstGeom>
+        </p:spPr>
+        <p:txBody>
+          <a:bodyPr vert="horz" lIns="91440" tIns="45720" rIns="91440" bIns="45720" rtlCol="0" anchor="b"/>
+          <a:lstStyle>
+            <a:lvl1pPr algn="r">
+              <a:defRPr sz="1200"/>
+            </a:lvl1pPr>
+          </a:lstStyle>
+          <a:p>
+            <a:r>
+              <a:rPr lang="cs-CZ"/>
+              <a:t>‹#›</a:t>
+            </a:r>
+          </a:p>
+        </p:txBody>
+      </p:sp>
     </p:spTree>
   </p:cSld>
   <p:clrMapOvr>
@@ -609,6 +1388,199 @@
           <a:chExt cx="0" cy="0"/>
         </a:xfrm>
       </p:grpSpPr>
+      <p:sp>
+        <p:nvSpPr>
+          <p:cNvPr id="2" name="Header Placeholder 1"/>
+          <p:cNvSpPr>
+            <a:spLocks noGrp="1"/>
+          </p:cNvSpPr>
+          <p:nvPr>
+            <p:ph type="hdr" sz="quarter"/>
+          </p:nvPr>
+        </p:nvSpPr>
+        <p:spPr>
+          <a:xfrm>
+            <a:off x="0" y="0"/>
+            <a:ext cx="3962400" cy="342900"/>
+          </a:xfrm>
+          <a:prstGeom prst="rect">
+            <a:avLst/>
+          </a:prstGeom>
+        </p:spPr>
+        <p:txBody>
+          <a:bodyPr vert="horz" lIns="91440" tIns="45720" rIns="91440" bIns="45720" rtlCol="0"/>
+          <a:lstStyle>
+            <a:lvl1pPr algn="l">
+              <a:defRPr sz="1200"/>
+            </a:lvl1pPr>
+          </a:lstStyle>
+          <a:p>
+            <a:endParaRPr/>
+          </a:p>
+        </p:txBody>
+      </p:sp>
+      <p:sp>
+        <p:nvSpPr>
+          <p:cNvPr id="3" name="Date Placeholder 2"/>
+          <p:cNvSpPr>
+            <a:spLocks noGrp="1"/>
+          </p:cNvSpPr>
+          <p:nvPr>
+            <p:ph type="dt" idx="1"/>
+          </p:nvPr>
+        </p:nvSpPr>
+        <p:spPr>
+          <a:xfrm>
+            <a:off x="5180013" y="0"/>
+            <a:ext cx="3962400" cy="342900"/>
+          </a:xfrm>
+          <a:prstGeom prst="rect">
+            <a:avLst/>
+          </a:prstGeom>
+        </p:spPr>
+        <p:txBody>
+          <a:bodyPr vert="horz" lIns="91440" tIns="45720" rIns="91440" bIns="45720" rtlCol="0"/>
+          <a:lstStyle>
+            <a:lvl1pPr algn="r">
+              <a:defRPr sz="1200"/>
+            </a:lvl1pPr>
+          </a:lstStyle>
+          <a:p>
+            <a:r>
+              <a:rPr lang="cs-CZ"/>
+              <a:t>1.7.2013</a:t>
+            </a:r>
+          </a:p>
+        </p:txBody>
+      </p:sp>
+      <p:sp>
+        <p:nvSpPr>
+          <p:cNvPr id="4" name="Slide Image Placeholder 3"/>
+          <p:cNvSpPr>
+            <a:spLocks noGrp="1" noRot="1" noChangeAspect="1"/>
+          </p:cNvSpPr>
+          <p:nvPr>
+            <p:ph type="sldImg" idx="2"/>
+          </p:nvPr>
+        </p:nvSpPr>
+        <p:spPr>
+          <a:xfrm>
+            <a:off x="2857500" y="512763"/>
+            <a:ext cx="3429000" cy="2566987"/>
+          </a:xfrm>
+          <a:prstGeom prst="rect">
+            <a:avLst/>
+          </a:prstGeom>
+          <a:noFill/>
+          <a:ln w="12700">
+            <a:solidFill>
+              <a:prstClr val="black"/>
+            </a:solidFill>
+          </a:ln>
+        </p:spPr>
+        <p:txBody>
+          <a:bodyPr vert="horz" lIns="91440" tIns="45720" rIns="91440" bIns="45720" rtlCol="0" anchor="ctr"/>
+          <a:lstStyle/>
+          <a:p>
+            <a:endParaRPr/>
+          </a:p>
+        </p:txBody>
+      </p:sp>
+      <p:sp>
+        <p:nvSpPr>
+          <p:cNvPr id="5" name="Notes Placeholder 4"/>
+          <p:cNvSpPr>
+            <a:spLocks noGrp="1"/>
+          </p:cNvSpPr>
+          <p:nvPr>
+            <p:ph type="body" sz="quarter" idx="3"/>
+          </p:nvPr>
+        </p:nvSpPr>
+        <p:spPr>
+          <a:xfrm>
+            <a:off x="914400" y="3251200"/>
+            <a:ext cx="7315200" cy="3081338"/>
+          </a:xfrm>
+          <a:prstGeom prst="rect">
+            <a:avLst/>
+          </a:prstGeom>
+        </p:spPr>
+        <p:txBody>
+          <a:bodyPr vert="horz" lIns="91440" tIns="45720" rIns="91440" bIns="45720" rtlCol="0"/>
+          <a:lstStyle/>
+          <a:p>
+            <a:r>
+              <a:rPr lang="en-US"/>
+              <a:t>4</a:t>
+            </a:r>
+          </a:p>
+        </p:txBody>
+      </p:sp>
+      <p:sp>
+        <p:nvSpPr>
+          <p:cNvPr id="6" name="Footer Placeholder 5"/>
+          <p:cNvSpPr>
+            <a:spLocks noGrp="1"/>
+          </p:cNvSpPr>
+          <p:nvPr>
+            <p:ph type="ftr" sz="quarter" idx="4"/>
+          </p:nvPr>
+        </p:nvSpPr>
+        <p:spPr>
+          <a:xfrm>
+            <a:off x="0" y="6502400"/>
+            <a:ext cx="3962400" cy="341313"/>
+          </a:xfrm>
+          <a:prstGeom prst="rect">
+            <a:avLst/>
+          </a:prstGeom>
+        </p:spPr>
+        <p:txBody>
+          <a:bodyPr vert="horz" lIns="91440" tIns="45720" rIns="91440" bIns="45720" rtlCol="0" anchor="b"/>
+          <a:lstStyle>
+            <a:lvl1pPr algn="l">
+              <a:defRPr sz="1200"/>
+            </a:lvl1pPr>
+          </a:lstStyle>
+          <a:p>
+            <a:endParaRPr/>
+          </a:p>
+        </p:txBody>
+      </p:sp>
+      <p:sp>
+        <p:nvSpPr>
+          <p:cNvPr id="7" name="Slide Number Placeholder 6"/>
+          <p:cNvSpPr>
+            <a:spLocks noGrp="1"/>
+          </p:cNvSpPr>
+          <p:nvPr>
+            <p:ph type="sldNum" sz="quarter" idx="5"/>
+          </p:nvPr>
+        </p:nvSpPr>
+        <p:spPr>
+          <a:xfrm>
+            <a:off x="5180013" y="6502400"/>
+            <a:ext cx="3962400" cy="341313"/>
+          </a:xfrm>
+          <a:prstGeom prst="rect">
+            <a:avLst/>
+          </a:prstGeom>
+        </p:spPr>
+        <p:txBody>
+          <a:bodyPr vert="horz" lIns="91440" tIns="45720" rIns="91440" bIns="45720" rtlCol="0" anchor="b"/>
+          <a:lstStyle>
+            <a:lvl1pPr algn="r">
+              <a:defRPr sz="1200"/>
+            </a:lvl1pPr>
+          </a:lstStyle>
+          <a:p>
+            <a:r>
+              <a:rPr lang="cs-CZ"/>
+              <a:t>‹#›</a:t>
+            </a:r>
+          </a:p>
+        </p:txBody>
+      </p:sp>
     </p:spTree>
   </p:cSld>
   <p:clrMapOvr>
@@ -634,6 +1606,199 @@
           <a:chExt cx="0" cy="0"/>
         </a:xfrm>
       </p:grpSpPr>
+      <p:sp>
+        <p:nvSpPr>
+          <p:cNvPr id="2" name="Header Placeholder 1"/>
+          <p:cNvSpPr>
+            <a:spLocks noGrp="1"/>
+          </p:cNvSpPr>
+          <p:nvPr>
+            <p:ph type="hdr" sz="quarter"/>
+          </p:nvPr>
+        </p:nvSpPr>
+        <p:spPr>
+          <a:xfrm>
+            <a:off x="0" y="0"/>
+            <a:ext cx="3962400" cy="342900"/>
+          </a:xfrm>
+          <a:prstGeom prst="rect">
+            <a:avLst/>
+          </a:prstGeom>
+        </p:spPr>
+        <p:txBody>
+          <a:bodyPr vert="horz" lIns="91440" tIns="45720" rIns="91440" bIns="45720" rtlCol="0"/>
+          <a:lstStyle>
+            <a:lvl1pPr algn="l">
+              <a:defRPr sz="1200"/>
+            </a:lvl1pPr>
+          </a:lstStyle>
+          <a:p>
+            <a:endParaRPr/>
+          </a:p>
+        </p:txBody>
+      </p:sp>
+      <p:sp>
+        <p:nvSpPr>
+          <p:cNvPr id="3" name="Date Placeholder 2"/>
+          <p:cNvSpPr>
+            <a:spLocks noGrp="1"/>
+          </p:cNvSpPr>
+          <p:nvPr>
+            <p:ph type="dt" idx="1"/>
+          </p:nvPr>
+        </p:nvSpPr>
+        <p:spPr>
+          <a:xfrm>
+            <a:off x="5180013" y="0"/>
+            <a:ext cx="3962400" cy="342900"/>
+          </a:xfrm>
+          <a:prstGeom prst="rect">
+            <a:avLst/>
+          </a:prstGeom>
+        </p:spPr>
+        <p:txBody>
+          <a:bodyPr vert="horz" lIns="91440" tIns="45720" rIns="91440" bIns="45720" rtlCol="0"/>
+          <a:lstStyle>
+            <a:lvl1pPr algn="r">
+              <a:defRPr sz="1200"/>
+            </a:lvl1pPr>
+          </a:lstStyle>
+          <a:p>
+            <a:r>
+              <a:rPr lang="cs-CZ"/>
+              <a:t>1.7.2013</a:t>
+            </a:r>
+          </a:p>
+        </p:txBody>
+      </p:sp>
+      <p:sp>
+        <p:nvSpPr>
+          <p:cNvPr id="4" name="Slide Image Placeholder 3"/>
+          <p:cNvSpPr>
+            <a:spLocks noGrp="1" noRot="1" noChangeAspect="1"/>
+          </p:cNvSpPr>
+          <p:nvPr>
+            <p:ph type="sldImg" idx="2"/>
+          </p:nvPr>
+        </p:nvSpPr>
+        <p:spPr>
+          <a:xfrm>
+            <a:off x="2857500" y="512763"/>
+            <a:ext cx="3429000" cy="2566987"/>
+          </a:xfrm>
+          <a:prstGeom prst="rect">
+            <a:avLst/>
+          </a:prstGeom>
+          <a:noFill/>
+          <a:ln w="12700">
+            <a:solidFill>
+              <a:prstClr val="black"/>
+            </a:solidFill>
+          </a:ln>
+        </p:spPr>
+        <p:txBody>
+          <a:bodyPr vert="horz" lIns="91440" tIns="45720" rIns="91440" bIns="45720" rtlCol="0" anchor="ctr"/>
+          <a:lstStyle/>
+          <a:p>
+            <a:endParaRPr/>
+          </a:p>
+        </p:txBody>
+      </p:sp>
+      <p:sp>
+        <p:nvSpPr>
+          <p:cNvPr id="5" name="Notes Placeholder 4"/>
+          <p:cNvSpPr>
+            <a:spLocks noGrp="1"/>
+          </p:cNvSpPr>
+          <p:nvPr>
+            <p:ph type="body" sz="quarter" idx="3"/>
+          </p:nvPr>
+        </p:nvSpPr>
+        <p:spPr>
+          <a:xfrm>
+            <a:off x="914400" y="3251200"/>
+            <a:ext cx="7315200" cy="3081338"/>
+          </a:xfrm>
+          <a:prstGeom prst="rect">
+            <a:avLst/>
+          </a:prstGeom>
+        </p:spPr>
+        <p:txBody>
+          <a:bodyPr vert="horz" lIns="91440" tIns="45720" rIns="91440" bIns="45720" rtlCol="0"/>
+          <a:lstStyle/>
+          <a:p>
+            <a:r>
+              <a:rPr lang="en-US"/>
+              <a:t>5</a:t>
+            </a:r>
+          </a:p>
+        </p:txBody>
+      </p:sp>
+      <p:sp>
+        <p:nvSpPr>
+          <p:cNvPr id="6" name="Footer Placeholder 5"/>
+          <p:cNvSpPr>
+            <a:spLocks noGrp="1"/>
+          </p:cNvSpPr>
+          <p:nvPr>
+            <p:ph type="ftr" sz="quarter" idx="4"/>
+          </p:nvPr>
+        </p:nvSpPr>
+        <p:spPr>
+          <a:xfrm>
+            <a:off x="0" y="6502400"/>
+            <a:ext cx="3962400" cy="341313"/>
+          </a:xfrm>
+          <a:prstGeom prst="rect">
+            <a:avLst/>
+          </a:prstGeom>
+        </p:spPr>
+        <p:txBody>
+          <a:bodyPr vert="horz" lIns="91440" tIns="45720" rIns="91440" bIns="45720" rtlCol="0" anchor="b"/>
+          <a:lstStyle>
+            <a:lvl1pPr algn="l">
+              <a:defRPr sz="1200"/>
+            </a:lvl1pPr>
+          </a:lstStyle>
+          <a:p>
+            <a:endParaRPr/>
+          </a:p>
+        </p:txBody>
+      </p:sp>
+      <p:sp>
+        <p:nvSpPr>
+          <p:cNvPr id="7" name="Slide Number Placeholder 6"/>
+          <p:cNvSpPr>
+            <a:spLocks noGrp="1"/>
+          </p:cNvSpPr>
+          <p:nvPr>
+            <p:ph type="sldNum" sz="quarter" idx="5"/>
+          </p:nvPr>
+        </p:nvSpPr>
+        <p:spPr>
+          <a:xfrm>
+            <a:off x="5180013" y="6502400"/>
+            <a:ext cx="3962400" cy="341313"/>
+          </a:xfrm>
+          <a:prstGeom prst="rect">
+            <a:avLst/>
+          </a:prstGeom>
+        </p:spPr>
+        <p:txBody>
+          <a:bodyPr vert="horz" lIns="91440" tIns="45720" rIns="91440" bIns="45720" rtlCol="0" anchor="b"/>
+          <a:lstStyle>
+            <a:lvl1pPr algn="r">
+              <a:defRPr sz="1200"/>
+            </a:lvl1pPr>
+          </a:lstStyle>
+          <a:p>
+            <a:r>
+              <a:rPr lang="cs-CZ"/>
+              <a:t>‹#›</a:t>
+            </a:r>
+          </a:p>
+        </p:txBody>
+      </p:sp>
     </p:spTree>
   </p:cSld>
   <p:clrMapOvr>
@@ -659,6 +1824,199 @@
           <a:chExt cx="0" cy="0"/>
         </a:xfrm>
       </p:grpSpPr>
+      <p:sp>
+        <p:nvSpPr>
+          <p:cNvPr id="2" name="Header Placeholder 1"/>
+          <p:cNvSpPr>
+            <a:spLocks noGrp="1"/>
+          </p:cNvSpPr>
+          <p:nvPr>
+            <p:ph type="hdr" sz="quarter"/>
+          </p:nvPr>
+        </p:nvSpPr>
+        <p:spPr>
+          <a:xfrm>
+            <a:off x="0" y="0"/>
+            <a:ext cx="3962400" cy="342900"/>
+          </a:xfrm>
+          <a:prstGeom prst="rect">
+            <a:avLst/>
+          </a:prstGeom>
+        </p:spPr>
+        <p:txBody>
+          <a:bodyPr vert="horz" lIns="91440" tIns="45720" rIns="91440" bIns="45720" rtlCol="0"/>
+          <a:lstStyle>
+            <a:lvl1pPr algn="l">
+              <a:defRPr sz="1200"/>
+            </a:lvl1pPr>
+          </a:lstStyle>
+          <a:p>
+            <a:endParaRPr/>
+          </a:p>
+        </p:txBody>
+      </p:sp>
+      <p:sp>
+        <p:nvSpPr>
+          <p:cNvPr id="3" name="Date Placeholder 2"/>
+          <p:cNvSpPr>
+            <a:spLocks noGrp="1"/>
+          </p:cNvSpPr>
+          <p:nvPr>
+            <p:ph type="dt" idx="1"/>
+          </p:nvPr>
+        </p:nvSpPr>
+        <p:spPr>
+          <a:xfrm>
+            <a:off x="5180013" y="0"/>
+            <a:ext cx="3962400" cy="342900"/>
+          </a:xfrm>
+          <a:prstGeom prst="rect">
+            <a:avLst/>
+          </a:prstGeom>
+        </p:spPr>
+        <p:txBody>
+          <a:bodyPr vert="horz" lIns="91440" tIns="45720" rIns="91440" bIns="45720" rtlCol="0"/>
+          <a:lstStyle>
+            <a:lvl1pPr algn="r">
+              <a:defRPr sz="1200"/>
+            </a:lvl1pPr>
+          </a:lstStyle>
+          <a:p>
+            <a:r>
+              <a:rPr lang="cs-CZ"/>
+              <a:t>1.7.2013</a:t>
+            </a:r>
+          </a:p>
+        </p:txBody>
+      </p:sp>
+      <p:sp>
+        <p:nvSpPr>
+          <p:cNvPr id="4" name="Slide Image Placeholder 3"/>
+          <p:cNvSpPr>
+            <a:spLocks noGrp="1" noRot="1" noChangeAspect="1"/>
+          </p:cNvSpPr>
+          <p:nvPr>
+            <p:ph type="sldImg" idx="2"/>
+          </p:nvPr>
+        </p:nvSpPr>
+        <p:spPr>
+          <a:xfrm>
+            <a:off x="2857500" y="512763"/>
+            <a:ext cx="3429000" cy="2566987"/>
+          </a:xfrm>
+          <a:prstGeom prst="rect">
+            <a:avLst/>
+          </a:prstGeom>
+          <a:noFill/>
+          <a:ln w="12700">
+            <a:solidFill>
+              <a:prstClr val="black"/>
+            </a:solidFill>
+          </a:ln>
+        </p:spPr>
+        <p:txBody>
+          <a:bodyPr vert="horz" lIns="91440" tIns="45720" rIns="91440" bIns="45720" rtlCol="0" anchor="ctr"/>
+          <a:lstStyle/>
+          <a:p>
+            <a:endParaRPr/>
+          </a:p>
+        </p:txBody>
+      </p:sp>
+      <p:sp>
+        <p:nvSpPr>
+          <p:cNvPr id="5" name="Notes Placeholder 4"/>
+          <p:cNvSpPr>
+            <a:spLocks noGrp="1"/>
+          </p:cNvSpPr>
+          <p:nvPr>
+            <p:ph type="body" sz="quarter" idx="3"/>
+          </p:nvPr>
+        </p:nvSpPr>
+        <p:spPr>
+          <a:xfrm>
+            <a:off x="914400" y="3251200"/>
+            <a:ext cx="7315200" cy="3081338"/>
+          </a:xfrm>
+          <a:prstGeom prst="rect">
+            <a:avLst/>
+          </a:prstGeom>
+        </p:spPr>
+        <p:txBody>
+          <a:bodyPr vert="horz" lIns="91440" tIns="45720" rIns="91440" bIns="45720" rtlCol="0"/>
+          <a:lstStyle/>
+          <a:p>
+            <a:r>
+              <a:rPr lang="en-US"/>
+              <a:t>6</a:t>
+            </a:r>
+          </a:p>
+        </p:txBody>
+      </p:sp>
+      <p:sp>
+        <p:nvSpPr>
+          <p:cNvPr id="6" name="Footer Placeholder 5"/>
+          <p:cNvSpPr>
+            <a:spLocks noGrp="1"/>
+          </p:cNvSpPr>
+          <p:nvPr>
+            <p:ph type="ftr" sz="quarter" idx="4"/>
+          </p:nvPr>
+        </p:nvSpPr>
+        <p:spPr>
+          <a:xfrm>
+            <a:off x="0" y="6502400"/>
+            <a:ext cx="3962400" cy="341313"/>
+          </a:xfrm>
+          <a:prstGeom prst="rect">
+            <a:avLst/>
+          </a:prstGeom>
+        </p:spPr>
+        <p:txBody>
+          <a:bodyPr vert="horz" lIns="91440" tIns="45720" rIns="91440" bIns="45720" rtlCol="0" anchor="b"/>
+          <a:lstStyle>
+            <a:lvl1pPr algn="l">
+              <a:defRPr sz="1200"/>
+            </a:lvl1pPr>
+          </a:lstStyle>
+          <a:p>
+            <a:endParaRPr/>
+          </a:p>
+        </p:txBody>
+      </p:sp>
+      <p:sp>
+        <p:nvSpPr>
+          <p:cNvPr id="7" name="Slide Number Placeholder 6"/>
+          <p:cNvSpPr>
+            <a:spLocks noGrp="1"/>
+          </p:cNvSpPr>
+          <p:nvPr>
+            <p:ph type="sldNum" sz="quarter" idx="5"/>
+          </p:nvPr>
+        </p:nvSpPr>
+        <p:spPr>
+          <a:xfrm>
+            <a:off x="5180013" y="6502400"/>
+            <a:ext cx="3962400" cy="341313"/>
+          </a:xfrm>
+          <a:prstGeom prst="rect">
+            <a:avLst/>
+          </a:prstGeom>
+        </p:spPr>
+        <p:txBody>
+          <a:bodyPr vert="horz" lIns="91440" tIns="45720" rIns="91440" bIns="45720" rtlCol="0" anchor="b"/>
+          <a:lstStyle>
+            <a:lvl1pPr algn="r">
+              <a:defRPr sz="1200"/>
+            </a:lvl1pPr>
+          </a:lstStyle>
+          <a:p>
+            <a:r>
+              <a:rPr lang="cs-CZ"/>
+              <a:t>‹#›</a:t>
+            </a:r>
+          </a:p>
+        </p:txBody>
+      </p:sp>
     </p:spTree>
   </p:cSld>
   <p:clrMapOvr>
@@ -684,6 +2042,199 @@
           <a:chExt cx="0" cy="0"/>
         </a:xfrm>
       </p:grpSpPr>
+      <p:sp>
+        <p:nvSpPr>
+          <p:cNvPr id="2" name="Header Placeholder 1"/>
+          <p:cNvSpPr>
+            <a:spLocks noGrp="1"/>
+          </p:cNvSpPr>
+          <p:nvPr>
+            <p:ph type="hdr" sz="quarter"/>
+          </p:nvPr>
+        </p:nvSpPr>
+        <p:spPr>
+          <a:xfrm>
+            <a:off x="0" y="0"/>
+            <a:ext cx="3962400" cy="342900"/>
+          </a:xfrm>
+          <a:prstGeom prst="rect">
+            <a:avLst/>
+          </a:prstGeom>
+        </p:spPr>
+        <p:txBody>
+          <a:bodyPr vert="horz" lIns="91440" tIns="45720" rIns="91440" bIns="45720" rtlCol="0"/>
+          <a:lstStyle>
+            <a:lvl1pPr algn="l">
+              <a:defRPr sz="1200"/>
+            </a:lvl1pPr>
+          </a:lstStyle>
+          <a:p>
+            <a:endParaRPr/>
+          </a:p>
+        </p:txBody>
+      </p:sp>
+      <p:sp>
+        <p:nvSpPr>
+          <p:cNvPr id="3" name="Date Placeholder 2"/>
+          <p:cNvSpPr>
+            <a:spLocks noGrp="1"/>
+          </p:cNvSpPr>
+          <p:nvPr>
+            <p:ph type="dt" idx="1"/>
+          </p:nvPr>
+        </p:nvSpPr>
+        <p:spPr>
+          <a:xfrm>
+            <a:off x="5180013" y="0"/>
+            <a:ext cx="3962400" cy="342900"/>
+          </a:xfrm>
+          <a:prstGeom prst="rect">
+            <a:avLst/>
+          </a:prstGeom>
+        </p:spPr>
+        <p:txBody>
+          <a:bodyPr vert="horz" lIns="91440" tIns="45720" rIns="91440" bIns="45720" rtlCol="0"/>
+          <a:lstStyle>
+            <a:lvl1pPr algn="r">
+              <a:defRPr sz="1200"/>
+            </a:lvl1pPr>
+          </a:lstStyle>
+          <a:p>
+            <a:r>
+              <a:rPr lang="cs-CZ"/>
+              <a:t>1.7.2013</a:t>
+            </a:r>
+          </a:p>
+        </p:txBody>
+      </p:sp>
+      <p:sp>
+        <p:nvSpPr>
+          <p:cNvPr id="4" name="Slide Image Placeholder 3"/>
+          <p:cNvSpPr>
+            <a:spLocks noGrp="1" noRot="1" noChangeAspect="1"/>
+          </p:cNvSpPr>
+          <p:nvPr>
+            <p:ph type="sldImg" idx="2"/>
+          </p:nvPr>
+        </p:nvSpPr>
+        <p:spPr>
+          <a:xfrm>
+            <a:off x="2857500" y="512763"/>
+            <a:ext cx="3429000" cy="2566987"/>
+          </a:xfrm>
+          <a:prstGeom prst="rect">
+            <a:avLst/>
+          </a:prstGeom>
+          <a:noFill/>
+          <a:ln w="12700">
+            <a:solidFill>
+              <a:prstClr val="black"/>
+            </a:solidFill>
+          </a:ln>
+        </p:spPr>
+        <p:txBody>
+          <a:bodyPr vert="horz" lIns="91440" tIns="45720" rIns="91440" bIns="45720" rtlCol="0" anchor="ctr"/>
+          <a:lstStyle/>
+          <a:p>
+            <a:endParaRPr/>
+          </a:p>
+        </p:txBody>
+      </p:sp>
+      <p:sp>
+        <p:nvSpPr>
+          <p:cNvPr id="5" name="Notes Placeholder 4"/>
+          <p:cNvSpPr>
+            <a:spLocks noGrp="1"/>
+          </p:cNvSpPr>
+          <p:nvPr>
+            <p:ph type="body" sz="quarter" idx="3"/>
+          </p:nvPr>
+        </p:nvSpPr>
+        <p:spPr>
+          <a:xfrm>
+            <a:off x="914400" y="3251200"/>
+            <a:ext cx="7315200" cy="3081338"/>
+          </a:xfrm>
+          <a:prstGeom prst="rect">
+            <a:avLst/>
+          </a:prstGeom>
+        </p:spPr>
+        <p:txBody>
+          <a:bodyPr vert="horz" lIns="91440" tIns="45720" rIns="91440" bIns="45720" rtlCol="0"/>
+          <a:lstStyle/>
+          <a:p>
+            <a:r>
+              <a:rPr lang="en-US"/>
+              <a:t>7</a:t>
+            </a:r>
+          </a:p>
+        </p:txBody>
+      </p:sp>
+      <p:sp>
+        <p:nvSpPr>
+          <p:cNvPr id="6" name="Footer Placeholder 5"/>
+          <p:cNvSpPr>
+            <a:spLocks noGrp="1"/>
+          </p:cNvSpPr>
+          <p:nvPr>
+            <p:ph type="ftr" sz="quarter" idx="4"/>
+          </p:nvPr>
+        </p:nvSpPr>
+        <p:spPr>
+          <a:xfrm>
+            <a:off x="0" y="6502400"/>
+            <a:ext cx="3962400" cy="341313"/>
+          </a:xfrm>
+          <a:prstGeom prst="rect">
+            <a:avLst/>
+          </a:prstGeom>
+        </p:spPr>
+        <p:txBody>
+          <a:bodyPr vert="horz" lIns="91440" tIns="45720" rIns="91440" bIns="45720" rtlCol="0" anchor="b"/>
+          <a:lstStyle>
+            <a:lvl1pPr algn="l">
+              <a:defRPr sz="1200"/>
+            </a:lvl1pPr>
+          </a:lstStyle>
+          <a:p>
+            <a:endParaRPr/>
+          </a:p>
+        </p:txBody>
+      </p:sp>
+      <p:sp>
+        <p:nvSpPr>
+          <p:cNvPr id="7" name="Slide Number Placeholder 6"/>
+          <p:cNvSpPr>
+            <a:spLocks noGrp="1"/>
+          </p:cNvSpPr>
+          <p:nvPr>
+            <p:ph type="sldNum" sz="quarter" idx="5"/>
+          </p:nvPr>
+        </p:nvSpPr>
+        <p:spPr>
+          <a:xfrm>
+            <a:off x="5180013" y="6502400"/>
+            <a:ext cx="3962400" cy="341313"/>
+          </a:xfrm>
+          <a:prstGeom prst="rect">
+            <a:avLst/>
+          </a:prstGeom>
+        </p:spPr>
+        <p:txBody>
+          <a:bodyPr vert="horz" lIns="91440" tIns="45720" rIns="91440" bIns="45720" rtlCol="0" anchor="b"/>
+          <a:lstStyle>
+            <a:lvl1pPr algn="r">
+              <a:defRPr sz="1200"/>
+            </a:lvl1pPr>
+          </a:lstStyle>
+          <a:p>
+            <a:r>
+              <a:rPr lang="cs-CZ"/>
+              <a:t>‹#›</a:t>
+            </a:r>
+          </a:p>
+        </p:txBody>
+      </p:sp>
     </p:spTree>
   </p:cSld>
   <p:clrMapOvr>
@@ -709,6 +2260,199 @@
           <a:chExt cx="0" cy="0"/>
         </a:xfrm>
       </p:grpSpPr>
+      <p:sp>
+        <p:nvSpPr>
+          <p:cNvPr id="2" name="Header Placeholder 1"/>
+          <p:cNvSpPr>
+            <a:spLocks noGrp="1"/>
+          </p:cNvSpPr>
+          <p:nvPr>
+            <p:ph type="hdr" sz="quarter"/>
+          </p:nvPr>
+        </p:nvSpPr>
+        <p:spPr>
+          <a:xfrm>
+            <a:off x="0" y="0"/>
+            <a:ext cx="3962400" cy="342900"/>
+          </a:xfrm>
+          <a:prstGeom prst="rect">
+            <a:avLst/>
+          </a:prstGeom>
+        </p:spPr>
+        <p:txBody>
+          <a:bodyPr vert="horz" lIns="91440" tIns="45720" rIns="91440" bIns="45720" rtlCol="0"/>
+          <a:lstStyle>
+            <a:lvl1pPr algn="l">
+              <a:defRPr sz="1200"/>
+            </a:lvl1pPr>
+          </a:lstStyle>
+          <a:p>
+            <a:endParaRPr/>
+          </a:p>
+        </p:txBody>
+      </p:sp>
+      <p:sp>
+        <p:nvSpPr>
+          <p:cNvPr id="3" name="Date Placeholder 2"/>
+          <p:cNvSpPr>
+            <a:spLocks noGrp="1"/>
+          </p:cNvSpPr>
+          <p:nvPr>
+            <p:ph type="dt" idx="1"/>
+          </p:nvPr>
+        </p:nvSpPr>
+        <p:spPr>
+          <a:xfrm>
+            <a:off x="5180013" y="0"/>
+            <a:ext cx="3962400" cy="342900"/>
+          </a:xfrm>
+          <a:prstGeom prst="rect">
+            <a:avLst/>
+          </a:prstGeom>
+        </p:spPr>
+        <p:txBody>
+          <a:bodyPr vert="horz" lIns="91440" tIns="45720" rIns="91440" bIns="45720" rtlCol="0"/>
+          <a:lstStyle>
+            <a:lvl1pPr algn="r">
+              <a:defRPr sz="1200"/>
+            </a:lvl1pPr>
+          </a:lstStyle>
+          <a:p>
+            <a:r>
+              <a:rPr lang="cs-CZ"/>
+              <a:t>1.7.2013</a:t>
+            </a:r>
+          </a:p>
+        </p:txBody>
+      </p:sp>
+      <p:sp>
+        <p:nvSpPr>
+          <p:cNvPr id="4" name="Slide Image Placeholder 3"/>
+          <p:cNvSpPr>
+            <a:spLocks noGrp="1" noRot="1" noChangeAspect="1"/>
+          </p:cNvSpPr>
+          <p:nvPr>
+            <p:ph type="sldImg" idx="2"/>
+          </p:nvPr>
+        </p:nvSpPr>
+        <p:spPr>
+          <a:xfrm>
+            <a:off x="2857500" y="512763"/>
+            <a:ext cx="3429000" cy="2566987"/>
+          </a:xfrm>
+          <a:prstGeom prst="rect">
+            <a:avLst/>
+          </a:prstGeom>
+          <a:noFill/>
+          <a:ln w="12700">
+            <a:solidFill>
+              <a:prstClr val="black"/>
+            </a:solidFill>
+          </a:ln>
+        </p:spPr>
+        <p:txBody>
+          <a:bodyPr vert="horz" lIns="91440" tIns="45720" rIns="91440" bIns="45720" rtlCol="0" anchor="ctr"/>
+          <a:lstStyle/>
+          <a:p>
+            <a:endParaRPr/>
+          </a:p>
+        </p:txBody>
+      </p:sp>
+      <p:sp>
+        <p:nvSpPr>
+          <p:cNvPr id="5" name="Notes Placeholder 4"/>
+          <p:cNvSpPr>
+            <a:spLocks noGrp="1"/>
+          </p:cNvSpPr>
+          <p:nvPr>
+            <p:ph type="body" sz="quarter" idx="3"/>
+          </p:nvPr>
+        </p:nvSpPr>
+        <p:spPr>
+          <a:xfrm>
+            <a:off x="914400" y="3251200"/>
+            <a:ext cx="7315200" cy="3081338"/>
+          </a:xfrm>
+          <a:prstGeom prst="rect">
+            <a:avLst/>
+          </a:prstGeom>
+        </p:spPr>
+        <p:txBody>
+          <a:bodyPr vert="horz" lIns="91440" tIns="45720" rIns="91440" bIns="45720" rtlCol="0"/>
+          <a:lstStyle/>
+          <a:p>
+            <a:r>
+              <a:rPr lang="en-US"/>
+              <a:t>8</a:t>
+            </a:r>
+          </a:p>
+        </p:txBody>
+      </p:sp>
+      <p:sp>
+        <p:nvSpPr>
+          <p:cNvPr id="6" name="Footer Placeholder 5"/>
+          <p:cNvSpPr>
+            <a:spLocks noGrp="1"/>
+          </p:cNvSpPr>
+          <p:nvPr>
+            <p:ph type="ftr" sz="quarter" idx="4"/>
+          </p:nvPr>
+        </p:nvSpPr>
+        <p:spPr>
+          <a:xfrm>
+            <a:off x="0" y="6502400"/>
+            <a:ext cx="3962400" cy="341313"/>
+          </a:xfrm>
+          <a:prstGeom prst="rect">
+            <a:avLst/>
+          </a:prstGeom>
+        </p:spPr>
+        <p:txBody>
+          <a:bodyPr vert="horz" lIns="91440" tIns="45720" rIns="91440" bIns="45720" rtlCol="0" anchor="b"/>
+          <a:lstStyle>
+            <a:lvl1pPr algn="l">
+              <a:defRPr sz="1200"/>
+            </a:lvl1pPr>
+          </a:lstStyle>
+          <a:p>
+            <a:endParaRPr/>
+          </a:p>
+        </p:txBody>
+      </p:sp>
+      <p:sp>
+        <p:nvSpPr>
+          <p:cNvPr id="7" name="Slide Number Placeholder 6"/>
+          <p:cNvSpPr>
+            <a:spLocks noGrp="1"/>
+          </p:cNvSpPr>
+          <p:nvPr>
+            <p:ph type="sldNum" sz="quarter" idx="5"/>
+          </p:nvPr>
+        </p:nvSpPr>
+        <p:spPr>
+          <a:xfrm>
+            <a:off x="5180013" y="6502400"/>
+            <a:ext cx="3962400" cy="341313"/>
+          </a:xfrm>
+          <a:prstGeom prst="rect">
+            <a:avLst/>
+          </a:prstGeom>
+        </p:spPr>
+        <p:txBody>
+          <a:bodyPr vert="horz" lIns="91440" tIns="45720" rIns="91440" bIns="45720" rtlCol="0" anchor="b"/>
+          <a:lstStyle>
+            <a:lvl1pPr algn="r">
+              <a:defRPr sz="1200"/>
+            </a:lvl1pPr>
+          </a:lstStyle>
+          <a:p>
+            <a:r>
+              <a:rPr lang="cs-CZ"/>
+              <a:t>‹#›</a:t>
+            </a:r>
+          </a:p>
+        </p:txBody>
+      </p:sp>
     </p:spTree>
   </p:cSld>
   <p:clrMapOvr>
@@ -734,6 +2478,199 @@
           <a:chExt cx="0" cy="0"/>
         </a:xfrm>
       </p:grpSpPr>
+      <p:sp>
+        <p:nvSpPr>
+          <p:cNvPr id="2" name="Header Placeholder 1"/>
+          <p:cNvSpPr>
+            <a:spLocks noGrp="1"/>
+          </p:cNvSpPr>
+          <p:nvPr>
+            <p:ph type="hdr" sz="quarter"/>
+          </p:nvPr>
+        </p:nvSpPr>
+        <p:spPr>
+          <a:xfrm>
+            <a:off x="0" y="0"/>
+            <a:ext cx="3962400" cy="342900"/>
+          </a:xfrm>
+          <a:prstGeom prst="rect">
+            <a:avLst/>
+          </a:prstGeom>
+        </p:spPr>
+        <p:txBody>
+          <a:bodyPr vert="horz" lIns="91440" tIns="45720" rIns="91440" bIns="45720" rtlCol="0"/>
+          <a:lstStyle>
+            <a:lvl1pPr algn="l">
+              <a:defRPr sz="1200"/>
+            </a:lvl1pPr>
+          </a:lstStyle>
+          <a:p>
+            <a:endParaRPr/>
+          </a:p>
+        </p:txBody>
+      </p:sp>
+      <p:sp>
+        <p:nvSpPr>
+          <p:cNvPr id="3" name="Date Placeholder 2"/>
+          <p:cNvSpPr>
+            <a:spLocks noGrp="1"/>
+          </p:cNvSpPr>
+          <p:nvPr>
+            <p:ph type="dt" idx="1"/>
+          </p:nvPr>
+        </p:nvSpPr>
+        <p:spPr>
+          <a:xfrm>
+            <a:off x="5180013" y="0"/>
+            <a:ext cx="3962400" cy="342900"/>
+          </a:xfrm>
+          <a:prstGeom prst="rect">
+            <a:avLst/>
+          </a:prstGeom>
+        </p:spPr>
+        <p:txBody>
+          <a:bodyPr vert="horz" lIns="91440" tIns="45720" rIns="91440" bIns="45720" rtlCol="0"/>
+          <a:lstStyle>
+            <a:lvl1pPr algn="r">
+              <a:defRPr sz="1200"/>
+            </a:lvl1pPr>
+          </a:lstStyle>
+          <a:p>
+            <a:r>
+              <a:rPr lang="cs-CZ"/>
+              <a:t>1.7.2013</a:t>
+            </a:r>
+          </a:p>
+        </p:txBody>
+      </p:sp>
+      <p:sp>
+        <p:nvSpPr>
+          <p:cNvPr id="4" name="Slide Image Placeholder 3"/>
+          <p:cNvSpPr>
+            <a:spLocks noGrp="1" noRot="1" noChangeAspect="1"/>
+          </p:cNvSpPr>
+          <p:nvPr>
+            <p:ph type="sldImg" idx="2"/>
+          </p:nvPr>
+        </p:nvSpPr>
+        <p:spPr>
+          <a:xfrm>
+            <a:off x="2857500" y="512763"/>
+            <a:ext cx="3429000" cy="2566987"/>
+          </a:xfrm>
+          <a:prstGeom prst="rect">
+            <a:avLst/>
+          </a:prstGeom>
+          <a:noFill/>
+          <a:ln w="12700">
+            <a:solidFill>
+              <a:prstClr val="black"/>
+            </a:solidFill>
+          </a:ln>
+        </p:spPr>
+        <p:txBody>
+          <a:bodyPr vert="horz" lIns="91440" tIns="45720" rIns="91440" bIns="45720" rtlCol="0" anchor="ctr"/>
+          <a:lstStyle/>
+          <a:p>
+            <a:endParaRPr/>
+          </a:p>
+        </p:txBody>
+      </p:sp>
+      <p:sp>
+        <p:nvSpPr>
+          <p:cNvPr id="5" name="Notes Placeholder 4"/>
+          <p:cNvSpPr>
+            <a:spLocks noGrp="1"/>
+          </p:cNvSpPr>
+          <p:nvPr>
+            <p:ph type="body" sz="quarter" idx="3"/>
+          </p:nvPr>
+        </p:nvSpPr>
+        <p:spPr>
+          <a:xfrm>
+            <a:off x="914400" y="3251200"/>
+            <a:ext cx="7315200" cy="3081338"/>
+          </a:xfrm>
+          <a:prstGeom prst="rect">
+            <a:avLst/>
+          </a:prstGeom>
+        </p:spPr>
+        <p:txBody>
+          <a:bodyPr vert="horz" lIns="91440" tIns="45720" rIns="91440" bIns="45720" rtlCol="0"/>
+          <a:lstStyle/>
+          <a:p>
+            <a:r>
+              <a:rPr lang="en-US"/>
+              <a:t>9</a:t>
+            </a:r>
+          </a:p>
+        </p:txBody>
+      </p:sp>
+      <p:sp>
+        <p:nvSpPr>
+          <p:cNvPr id="6" name="Footer Placeholder 5"/>
+          <p:cNvSpPr>
+            <a:spLocks noGrp="1"/>
+          </p:cNvSpPr>
+          <p:nvPr>
+            <p:ph type="ftr" sz="quarter" idx="4"/>
+          </p:nvPr>
+        </p:nvSpPr>
+        <p:spPr>
+          <a:xfrm>
+            <a:off x="0" y="6502400"/>
+            <a:ext cx="3962400" cy="341313"/>
+          </a:xfrm>
+          <a:prstGeom prst="rect">
+            <a:avLst/>
+          </a:prstGeom>
+        </p:spPr>
+        <p:txBody>
+          <a:bodyPr vert="horz" lIns="91440" tIns="45720" rIns="91440" bIns="45720" rtlCol="0" anchor="b"/>
+          <a:lstStyle>
+            <a:lvl1pPr algn="l">
+              <a:defRPr sz="1200"/>
+            </a:lvl1pPr>
+          </a:lstStyle>
+          <a:p>
+            <a:endParaRPr/>
+          </a:p>
+        </p:txBody>
+      </p:sp>
+      <p:sp>
+        <p:nvSpPr>
+          <p:cNvPr id="7" name="Slide Number Placeholder 6"/>
+          <p:cNvSpPr>
+            <a:spLocks noGrp="1"/>
+          </p:cNvSpPr>
+          <p:nvPr>
+            <p:ph type="sldNum" sz="quarter" idx="5"/>
+          </p:nvPr>
+        </p:nvSpPr>
+        <p:spPr>
+          <a:xfrm>
+            <a:off x="5180013" y="6502400"/>
+            <a:ext cx="3962400" cy="341313"/>
+          </a:xfrm>
+          <a:prstGeom prst="rect">
+            <a:avLst/>
+          </a:prstGeom>
+        </p:spPr>
+        <p:txBody>
+          <a:bodyPr vert="horz" lIns="91440" tIns="45720" rIns="91440" bIns="45720" rtlCol="0" anchor="b"/>
+          <a:lstStyle>
+            <a:lvl1pPr algn="r">
+              <a:defRPr sz="1200"/>
+            </a:lvl1pPr>
+          </a:lstStyle>
+          <a:p>
+            <a:r>
+              <a:rPr lang="cs-CZ"/>
+              <a:t>‹#›</a:t>
+            </a:r>
+          </a:p>
+        </p:txBody>
+      </p:sp>
     </p:spTree>
   </p:cSld>
   <p:clrMapOvr>
@@ -780,10 +2717,9 @@
           <a:lstStyle/>
           <a:p>
             <a:r>
-              <a:rPr lang="en-US" smtClean="0"/>
+              <a:rPr lang="en-US"/>
               <a:t>Click to edit Master title style</a:t>
             </a:r>
-            <a:endParaRPr lang="en-US"/>
           </a:p>
         </p:txBody>
       </p:sp>
@@ -899,10 +2835,9 @@
           </a:lstStyle>
           <a:p>
             <a:r>
-              <a:rPr lang="en-US" smtClean="0"/>
+              <a:rPr lang="en-US"/>
               <a:t>Click to edit Master subtitle style</a:t>
             </a:r>
-            <a:endParaRPr lang="en-US"/>
           </a:p>
         </p:txBody>
       </p:sp>
@@ -924,7 +2859,7 @@
             <a:fld id="{1D8BD707-D9CF-40AE-B4C6-C98DA3205C09}" type="datetimeFigureOut">
               <a:rPr lang="en-US" smtClean="0"/>
               <a:pPr/>
-              <a:t>22/08/2026</a:t>
+              <a:t>8/22/2026</a:t>
             </a:fld>
             <a:endParaRPr lang="en-US"/>
           </a:p>
@@ -1014,10 +2949,9 @@
           <a:lstStyle/>
           <a:p>
             <a:r>
-              <a:rPr lang="en-US" smtClean="0"/>
+              <a:rPr lang="en-US"/>
               <a:t>Click to edit Master title style</a:t>
             </a:r>
-            <a:endParaRPr lang="en-US"/>
           </a:p>
         </p:txBody>
       </p:sp>
@@ -1038,38 +2972,37 @@
           <a:p>
             <a:pPr lvl="0"/>
             <a:r>
-              <a:rPr lang="en-US" smtClean="0"/>
+              <a:rPr lang="en-US"/>
               <a:t>Click to edit Master text styles</a:t>
             </a:r>
           </a:p>
           <a:p>
             <a:pPr lvl="1"/>
             <a:r>
-              <a:rPr lang="en-US" smtClean="0"/>
+              <a:rPr lang="en-US"/>
               <a:t>Second level</a:t>
             </a:r>
           </a:p>
           <a:p>
             <a:pPr lvl="2"/>
             <a:r>
-              <a:rPr lang="en-US" smtClean="0"/>
+              <a:rPr lang="en-US"/>
               <a:t>Third level</a:t>
             </a:r>
           </a:p>
           <a:p>
             <a:pPr lvl="3"/>
             <a:r>
-              <a:rPr lang="en-US" smtClean="0"/>
+              <a:rPr lang="en-US"/>
               <a:t>Fourth level</a:t>
             </a:r>
           </a:p>
           <a:p>
             <a:pPr lvl="4"/>
             <a:r>
-              <a:rPr lang="en-US" smtClean="0"/>
+              <a:rPr lang="en-US"/>
               <a:t>Fifth level</a:t>
             </a:r>
-            <a:endParaRPr lang="en-US"/>
           </a:p>
         </p:txBody>
       </p:sp>
@@ -1091,7 +3024,7 @@
             <a:fld id="{1D8BD707-D9CF-40AE-B4C6-C98DA3205C09}" type="datetimeFigureOut">
               <a:rPr lang="en-US" smtClean="0"/>
               <a:pPr/>
-              <a:t>22/08/2026</a:t>
+              <a:t>8/22/2026</a:t>
             </a:fld>
             <a:endParaRPr lang="en-US"/>
           </a:p>
@@ -1186,10 +3119,9 @@
           <a:lstStyle/>
           <a:p>
             <a:r>
-              <a:rPr lang="en-US" smtClean="0"/>
+              <a:rPr lang="en-US"/>
               <a:t>Click to edit Master title style</a:t>
             </a:r>
-            <a:endParaRPr lang="en-US"/>
           </a:p>
         </p:txBody>
       </p:sp>
@@ -1215,38 +3147,37 @@
           <a:p>
             <a:pPr lvl="0"/>
             <a:r>
-              <a:rPr lang="en-US" smtClean="0"/>
+              <a:rPr lang="en-US"/>
               <a:t>Click to edit Master text styles</a:t>
             </a:r>
           </a:p>
           <a:p>
             <a:pPr lvl="1"/>
             <a:r>
-              <a:rPr lang="en-US" smtClean="0"/>
+              <a:rPr lang="en-US"/>
               <a:t>Second level</a:t>
             </a:r>
           </a:p>
           <a:p>
             <a:pPr lvl="2"/>
             <a:r>
-              <a:rPr lang="en-US" smtClean="0"/>
+              <a:rPr lang="en-US"/>
               <a:t>Third level</a:t>
             </a:r>
           </a:p>
           <a:p>
             <a:pPr lvl="3"/>
             <a:r>
-              <a:rPr lang="en-US" smtClean="0"/>
+              <a:rPr lang="en-US"/>
               <a:t>Fourth level</a:t>
             </a:r>
           </a:p>
           <a:p>
             <a:pPr lvl="4"/>
             <a:r>
-              <a:rPr lang="en-US" smtClean="0"/>
+              <a:rPr lang="en-US"/>
               <a:t>Fifth level</a:t>
             </a:r>
-            <a:endParaRPr lang="en-US"/>
           </a:p>
         </p:txBody>
       </p:sp>
@@ -1268,7 +3199,7 @@
             <a:fld id="{1D8BD707-D9CF-40AE-B4C6-C98DA3205C09}" type="datetimeFigureOut">
               <a:rPr lang="en-US" smtClean="0"/>
               <a:pPr/>
-              <a:t>22/08/2026</a:t>
+              <a:t>8/22/2026</a:t>
             </a:fld>
             <a:endParaRPr lang="en-US"/>
           </a:p>
@@ -1358,10 +3289,9 @@
           <a:lstStyle/>
           <a:p>
             <a:r>
-              <a:rPr lang="en-US" smtClean="0"/>
+              <a:rPr lang="en-US"/>
               <a:t>Click to edit Master title style</a:t>
             </a:r>
-            <a:endParaRPr lang="en-US"/>
           </a:p>
         </p:txBody>
       </p:sp>
@@ -1382,38 +3312,37 @@
           <a:p>
             <a:pPr lvl="0"/>
             <a:r>
-              <a:rPr lang="en-US" smtClean="0"/>
+              <a:rPr lang="en-US"/>
               <a:t>Click to edit Master text styles</a:t>
             </a:r>
           </a:p>
           <a:p>
             <a:pPr lvl="1"/>
             <a:r>
-              <a:rPr lang="en-US" smtClean="0"/>
+              <a:rPr lang="en-US"/>
               <a:t>Second level</a:t>
             </a:r>
           </a:p>
           <a:p>
             <a:pPr lvl="2"/>
             <a:r>
-              <a:rPr lang="en-US" smtClean="0"/>
+              <a:rPr lang="en-US"/>
               <a:t>Third level</a:t>
             </a:r>
           </a:p>
           <a:p>
             <a:pPr lvl="3"/>
             <a:r>
-              <a:rPr lang="en-US" smtClean="0"/>
+              <a:rPr lang="en-US"/>
               <a:t>Fourth level</a:t>
             </a:r>
           </a:p>
           <a:p>
             <a:pPr lvl="4"/>
             <a:r>
-              <a:rPr lang="en-US" smtClean="0"/>
+              <a:rPr lang="en-US"/>
               <a:t>Fifth level</a:t>
             </a:r>
-            <a:endParaRPr lang="en-US"/>
           </a:p>
         </p:txBody>
       </p:sp>
@@ -1435,7 +3364,7 @@
             <a:fld id="{1D8BD707-D9CF-40AE-B4C6-C98DA3205C09}" type="datetimeFigureOut">
               <a:rPr lang="en-US" smtClean="0"/>
               <a:pPr/>
-              <a:t>22/08/2026</a:t>
+              <a:t>8/22/2026</a:t>
             </a:fld>
             <a:endParaRPr lang="en-US"/>
           </a:p>
@@ -1534,10 +3463,9 @@
           </a:lstStyle>
           <a:p>
             <a:r>
-              <a:rPr lang="en-US" smtClean="0"/>
+              <a:rPr lang="en-US"/>
               <a:t>Click to edit Master title style</a:t>
             </a:r>
-            <a:endParaRPr lang="en-US"/>
           </a:p>
         </p:txBody>
       </p:sp>
@@ -1654,7 +3582,7 @@
           <a:p>
             <a:pPr lvl="0"/>
             <a:r>
-              <a:rPr lang="en-US" smtClean="0"/>
+              <a:rPr lang="en-US"/>
               <a:t>Click to edit Master text styles</a:t>
             </a:r>
           </a:p>
@@ -1678,7 +3606,7 @@
             <a:fld id="{1D8BD707-D9CF-40AE-B4C6-C98DA3205C09}" type="datetimeFigureOut">
               <a:rPr lang="en-US" smtClean="0"/>
               <a:pPr/>
-              <a:t>22/08/2026</a:t>
+              <a:t>8/22/2026</a:t>
             </a:fld>
             <a:endParaRPr lang="en-US"/>
           </a:p>
@@ -1768,10 +3696,9 @@
           <a:lstStyle/>
           <a:p>
             <a:r>
-              <a:rPr lang="en-US" smtClean="0"/>
+              <a:rPr lang="en-US"/>
               <a:t>Click to edit Master title style</a:t>
             </a:r>
-            <a:endParaRPr lang="en-US"/>
           </a:p>
         </p:txBody>
       </p:sp>
@@ -1825,38 +3752,37 @@
           <a:p>
             <a:pPr lvl="0"/>
             <a:r>
-              <a:rPr lang="en-US" smtClean="0"/>
+              <a:rPr lang="en-US"/>
               <a:t>Click to edit Master text styles</a:t>
             </a:r>
           </a:p>
           <a:p>
             <a:pPr lvl="1"/>
             <a:r>
-              <a:rPr lang="en-US" smtClean="0"/>
+              <a:rPr lang="en-US"/>
               <a:t>Second level</a:t>
             </a:r>
           </a:p>
           <a:p>
             <a:pPr lvl="2"/>
             <a:r>
-              <a:rPr lang="en-US" smtClean="0"/>
+              <a:rPr lang="en-US"/>
               <a:t>Third level</a:t>
             </a:r>
           </a:p>
           <a:p>
             <a:pPr lvl="3"/>
             <a:r>
-              <a:rPr lang="en-US" smtClean="0"/>
+              <a:rPr lang="en-US"/>
               <a:t>Fourth level</a:t>
             </a:r>
           </a:p>
           <a:p>
             <a:pPr lvl="4"/>
             <a:r>
-              <a:rPr lang="en-US" smtClean="0"/>
+              <a:rPr lang="en-US"/>
               <a:t>Fifth level</a:t>
             </a:r>
-            <a:endParaRPr lang="en-US"/>
           </a:p>
         </p:txBody>
       </p:sp>
@@ -1910,38 +3836,37 @@
           <a:p>
             <a:pPr lvl="0"/>
             <a:r>
-              <a:rPr lang="en-US" smtClean="0"/>
+              <a:rPr lang="en-US"/>
               <a:t>Click to edit Master text styles</a:t>
             </a:r>
           </a:p>
           <a:p>
             <a:pPr lvl="1"/>
             <a:r>
-              <a:rPr lang="en-US" smtClean="0"/>
+              <a:rPr lang="en-US"/>
               <a:t>Second level</a:t>
             </a:r>
           </a:p>
           <a:p>
             <a:pPr lvl="2"/>
             <a:r>
-              <a:rPr lang="en-US" smtClean="0"/>
+              <a:rPr lang="en-US"/>
               <a:t>Third level</a:t>
             </a:r>
           </a:p>
           <a:p>
             <a:pPr lvl="3"/>
             <a:r>
-              <a:rPr lang="en-US" smtClean="0"/>
+              <a:rPr lang="en-US"/>
               <a:t>Fourth level</a:t>
             </a:r>
           </a:p>
           <a:p>
             <a:pPr lvl="4"/>
             <a:r>
-              <a:rPr lang="en-US" smtClean="0"/>
+              <a:rPr lang="en-US"/>
               <a:t>Fifth level</a:t>
             </a:r>
-            <a:endParaRPr lang="en-US"/>
           </a:p>
         </p:txBody>
       </p:sp>
@@ -1963,7 +3888,7 @@
             <a:fld id="{1D8BD707-D9CF-40AE-B4C6-C98DA3205C09}" type="datetimeFigureOut">
               <a:rPr lang="en-US" smtClean="0"/>
               <a:pPr/>
-              <a:t>22/08/2026</a:t>
+              <a:t>8/22/2026</a:t>
             </a:fld>
             <a:endParaRPr lang="en-US"/>
           </a:p>
@@ -2057,10 +3982,9 @@
           </a:lstStyle>
           <a:p>
             <a:r>
-              <a:rPr lang="en-US" smtClean="0"/>
+              <a:rPr lang="en-US"/>
               <a:t>Click to edit Master title style</a:t>
             </a:r>
-            <a:endParaRPr lang="en-US"/>
           </a:p>
         </p:txBody>
       </p:sp>
@@ -2123,7 +4047,7 @@
           <a:p>
             <a:pPr lvl="0"/>
             <a:r>
-              <a:rPr lang="en-US" smtClean="0"/>
+              <a:rPr lang="en-US"/>
               <a:t>Click to edit Master text styles</a:t>
             </a:r>
           </a:p>
@@ -2179,38 +4103,37 @@
           <a:p>
             <a:pPr lvl="0"/>
             <a:r>
-              <a:rPr lang="en-US" smtClean="0"/>
+              <a:rPr lang="en-US"/>
               <a:t>Click to edit Master text styles</a:t>
             </a:r>
           </a:p>
           <a:p>
             <a:pPr lvl="1"/>
             <a:r>
-              <a:rPr lang="en-US" smtClean="0"/>
+              <a:rPr lang="en-US"/>
               <a:t>Second level</a:t>
             </a:r>
           </a:p>
           <a:p>
             <a:pPr lvl="2"/>
             <a:r>
-              <a:rPr lang="en-US" smtClean="0"/>
+              <a:rPr lang="en-US"/>
               <a:t>Third level</a:t>
             </a:r>
           </a:p>
           <a:p>
             <a:pPr lvl="3"/>
             <a:r>
-              <a:rPr lang="en-US" smtClean="0"/>
+              <a:rPr lang="en-US"/>
               <a:t>Fourth level</a:t>
             </a:r>
           </a:p>
           <a:p>
             <a:pPr lvl="4"/>
             <a:r>
-              <a:rPr lang="en-US" smtClean="0"/>
+              <a:rPr lang="en-US"/>
               <a:t>Fifth level</a:t>
             </a:r>
-            <a:endParaRPr lang="en-US"/>
           </a:p>
         </p:txBody>
       </p:sp>
@@ -2273,7 +4196,7 @@
           <a:p>
             <a:pPr lvl="0"/>
             <a:r>
-              <a:rPr lang="en-US" smtClean="0"/>
+              <a:rPr lang="en-US"/>
               <a:t>Click to edit Master text styles</a:t>
             </a:r>
           </a:p>
@@ -2329,38 +4252,37 @@
           <a:p>
             <a:pPr lvl="0"/>
             <a:r>
-              <a:rPr lang="en-US" smtClean="0"/>
+              <a:rPr lang="en-US"/>
               <a:t>Click to edit Master text styles</a:t>
             </a:r>
           </a:p>
           <a:p>
             <a:pPr lvl="1"/>
             <a:r>
-              <a:rPr lang="en-US" smtClean="0"/>
+              <a:rPr lang="en-US"/>
               <a:t>Second level</a:t>
             </a:r>
           </a:p>
           <a:p>
             <a:pPr lvl="2"/>
             <a:r>
-              <a:rPr lang="en-US" smtClean="0"/>
+              <a:rPr lang="en-US"/>
               <a:t>Third level</a:t>
             </a:r>
           </a:p>
           <a:p>
             <a:pPr lvl="3"/>
             <a:r>
-              <a:rPr lang="en-US" smtClean="0"/>
+              <a:rPr lang="en-US"/>
               <a:t>Fourth level</a:t>
             </a:r>
           </a:p>
           <a:p>
             <a:pPr lvl="4"/>
             <a:r>
-              <a:rPr lang="en-US" smtClean="0"/>
+              <a:rPr lang="en-US"/>
               <a:t>Fifth level</a:t>
             </a:r>
-            <a:endParaRPr lang="en-US"/>
           </a:p>
         </p:txBody>
       </p:sp>
@@ -2382,7 +4304,7 @@
             <a:fld id="{1D8BD707-D9CF-40AE-B4C6-C98DA3205C09}" type="datetimeFigureOut">
               <a:rPr lang="en-US" smtClean="0"/>
               <a:pPr/>
-              <a:t>22/08/2026</a:t>
+              <a:t>8/22/2026</a:t>
             </a:fld>
             <a:endParaRPr lang="en-US"/>
           </a:p>
@@ -2472,10 +4394,9 @@
           <a:lstStyle/>
           <a:p>
             <a:r>
-              <a:rPr lang="en-US" smtClean="0"/>
+              <a:rPr lang="en-US"/>
               <a:t>Click to edit Master title style</a:t>
             </a:r>
-            <a:endParaRPr lang="en-US"/>
           </a:p>
         </p:txBody>
       </p:sp>
@@ -2497,7 +4418,7 @@
             <a:fld id="{1D8BD707-D9CF-40AE-B4C6-C98DA3205C09}" type="datetimeFigureOut">
               <a:rPr lang="en-US" smtClean="0"/>
               <a:pPr/>
-              <a:t>22/08/2026</a:t>
+              <a:t>8/22/2026</a:t>
             </a:fld>
             <a:endParaRPr lang="en-US"/>
           </a:p>
@@ -2589,7 +4510,7 @@
             <a:fld id="{1D8BD707-D9CF-40AE-B4C6-C98DA3205C09}" type="datetimeFigureOut">
               <a:rPr lang="en-US" smtClean="0"/>
               <a:pPr/>
-              <a:t>22/08/2026</a:t>
+              <a:t>8/22/2026</a:t>
             </a:fld>
             <a:endParaRPr lang="en-US"/>
           </a:p>
@@ -2688,10 +4609,9 @@
           </a:lstStyle>
           <a:p>
             <a:r>
-              <a:rPr lang="en-US" smtClean="0"/>
+              <a:rPr lang="en-US"/>
               <a:t>Click to edit Master title style</a:t>
             </a:r>
-            <a:endParaRPr lang="en-US"/>
           </a:p>
         </p:txBody>
       </p:sp>
@@ -2745,38 +4665,37 @@
           <a:p>
             <a:pPr lvl="0"/>
             <a:r>
-              <a:rPr lang="en-US" smtClean="0"/>
+              <a:rPr lang="en-US"/>
               <a:t>Click to edit Master text styles</a:t>
             </a:r>
           </a:p>
           <a:p>
             <a:pPr lvl="1"/>
             <a:r>
-              <a:rPr lang="en-US" smtClean="0"/>
+              <a:rPr lang="en-US"/>
               <a:t>Second level</a:t>
             </a:r>
           </a:p>
           <a:p>
             <a:pPr lvl="2"/>
             <a:r>
-              <a:rPr lang="en-US" smtClean="0"/>
+              <a:rPr lang="en-US"/>
               <a:t>Third level</a:t>
             </a:r>
           </a:p>
           <a:p>
             <a:pPr lvl="3"/>
             <a:r>
-              <a:rPr lang="en-US" smtClean="0"/>
+              <a:rPr lang="en-US"/>
               <a:t>Fourth level</a:t>
             </a:r>
           </a:p>
           <a:p>
             <a:pPr lvl="4"/>
             <a:r>
-              <a:rPr lang="en-US" smtClean="0"/>
+              <a:rPr lang="en-US"/>
               <a:t>Fifth level</a:t>
             </a:r>
-            <a:endParaRPr lang="en-US"/>
           </a:p>
         </p:txBody>
       </p:sp>
@@ -2839,7 +4758,7 @@
           <a:p>
             <a:pPr lvl="0"/>
             <a:r>
-              <a:rPr lang="en-US" smtClean="0"/>
+              <a:rPr lang="en-US"/>
               <a:t>Click to edit Master text styles</a:t>
             </a:r>
           </a:p>
@@ -2863,7 +4782,7 @@
             <a:fld id="{1D8BD707-D9CF-40AE-B4C6-C98DA3205C09}" type="datetimeFigureOut">
               <a:rPr lang="en-US" smtClean="0"/>
               <a:pPr/>
-              <a:t>22/08/2026</a:t>
+              <a:t>8/22/2026</a:t>
             </a:fld>
             <a:endParaRPr lang="en-US"/>
           </a:p>
@@ -2962,10 +4881,9 @@
           </a:lstStyle>
           <a:p>
             <a:r>
-              <a:rPr lang="en-US" smtClean="0"/>
+              <a:rPr lang="en-US"/>
               <a:t>Click to edit Master title style</a:t>
             </a:r>
-            <a:endParaRPr lang="en-US"/>
           </a:p>
         </p:txBody>
       </p:sp>
@@ -3089,7 +5007,7 @@
           <a:p>
             <a:pPr lvl="0"/>
             <a:r>
-              <a:rPr lang="en-US" smtClean="0"/>
+              <a:rPr lang="en-US"/>
               <a:t>Click to edit Master text styles</a:t>
             </a:r>
           </a:p>
@@ -3113,7 +5031,7 @@
             <a:fld id="{1D8BD707-D9CF-40AE-B4C6-C98DA3205C09}" type="datetimeFigureOut">
               <a:rPr lang="en-US" smtClean="0"/>
               <a:pPr/>
-              <a:t>22/08/2026</a:t>
+              <a:t>8/22/2026</a:t>
             </a:fld>
             <a:endParaRPr lang="en-US"/>
           </a:p>
@@ -3218,10 +5136,9 @@
           <a:lstStyle/>
           <a:p>
             <a:r>
-              <a:rPr lang="en-US" smtClean="0"/>
+              <a:rPr lang="en-US"/>
               <a:t>Click to edit Master title style</a:t>
             </a:r>
-            <a:endParaRPr lang="en-US"/>
           </a:p>
         </p:txBody>
       </p:sp>
@@ -3252,38 +5169,37 @@
           <a:p>
             <a:pPr lvl="0"/>
             <a:r>
-              <a:rPr lang="en-US" smtClean="0"/>
+              <a:rPr lang="en-US"/>
               <a:t>Click to edit Master text styles</a:t>
             </a:r>
           </a:p>
           <a:p>
             <a:pPr lvl="1"/>
             <a:r>
-              <a:rPr lang="en-US" smtClean="0"/>
+              <a:rPr lang="en-US"/>
               <a:t>Second level</a:t>
             </a:r>
           </a:p>
           <a:p>
             <a:pPr lvl="2"/>
             <a:r>
-              <a:rPr lang="en-US" smtClean="0"/>
+              <a:rPr lang="en-US"/>
               <a:t>Third level</a:t>
             </a:r>
           </a:p>
           <a:p>
             <a:pPr lvl="3"/>
             <a:r>
-              <a:rPr lang="en-US" smtClean="0"/>
+              <a:rPr lang="en-US"/>
               <a:t>Fourth level</a:t>
             </a:r>
           </a:p>
           <a:p>
             <a:pPr lvl="4"/>
             <a:r>
-              <a:rPr lang="en-US" smtClean="0"/>
+              <a:rPr lang="en-US"/>
               <a:t>Fifth level</a:t>
             </a:r>
-            <a:endParaRPr lang="en-US"/>
           </a:p>
         </p:txBody>
       </p:sp>
@@ -3323,7 +5239,7 @@
             <a:fld id="{1D8BD707-D9CF-40AE-B4C6-C98DA3205C09}" type="datetimeFigureOut">
               <a:rPr lang="en-US" smtClean="0"/>
               <a:pPr/>
-              <a:t>22/08/2026</a:t>
+              <a:t>8/22/2026</a:t>
             </a:fld>
             <a:endParaRPr lang="en-US"/>
           </a:p>
@@ -4277,10 +6193,10 @@
             </a:pathLst>
           </a:custGeom>
           <a:blipFill>
-            <a:blip r:embed="rId4">
+            <a:blip>
               <a:extLst>
                 <a:ext uri="{96DAC541-7B7A-43D3-8B79-37D633B846F1}">
-                  <asvg:svgBlip xmlns:asvg="http://schemas.microsoft.com/office/drawing/2016/SVG/main" xmlns="" r:embed="rId5"/>
+                  <asvg:svgBlip xmlns:asvg="http://schemas.microsoft.com/office/drawing/2016/SVG/main" r:embed="rId4"/>
                 </a:ext>
               </a:extLst>
             </a:blip>
@@ -4411,10 +6327,10 @@
             </a:pathLst>
           </a:custGeom>
           <a:blipFill>
-            <a:blip r:embed="rId4">
+            <a:blip>
               <a:extLst>
                 <a:ext uri="{96DAC541-7B7A-43D3-8B79-37D633B846F1}">
-                  <asvg:svgBlip xmlns:asvg="http://schemas.microsoft.com/office/drawing/2016/SVG/main" xmlns="" r:embed="rId5"/>
+                  <asvg:svgBlip xmlns:asvg="http://schemas.microsoft.com/office/drawing/2016/SVG/main" r:embed="rId4"/>
                 </a:ext>
               </a:extLst>
             </a:blip>
@@ -4545,10 +6461,10 @@
             </a:pathLst>
           </a:custGeom>
           <a:blipFill>
-            <a:blip r:embed="rId4">
+            <a:blip>
               <a:extLst>
                 <a:ext uri="{96DAC541-7B7A-43D3-8B79-37D633B846F1}">
-                  <asvg:svgBlip xmlns:asvg="http://schemas.microsoft.com/office/drawing/2016/SVG/main" xmlns="" r:embed="rId5"/>
+                  <asvg:svgBlip xmlns:asvg="http://schemas.microsoft.com/office/drawing/2016/SVG/main" r:embed="rId4"/>
                 </a:ext>
               </a:extLst>
             </a:blip>
@@ -4679,10 +6595,10 @@
             </a:pathLst>
           </a:custGeom>
           <a:blipFill>
-            <a:blip r:embed="rId4">
+            <a:blip>
               <a:extLst>
                 <a:ext uri="{96DAC541-7B7A-43D3-8B79-37D633B846F1}">
-                  <asvg:svgBlip xmlns:asvg="http://schemas.microsoft.com/office/drawing/2016/SVG/main" xmlns="" r:embed="rId5"/>
+                  <asvg:svgBlip xmlns:asvg="http://schemas.microsoft.com/office/drawing/2016/SVG/main" r:embed="rId4"/>
                 </a:ext>
               </a:extLst>
             </a:blip>
@@ -5935,10 +7851,10 @@
             </a:pathLst>
           </a:custGeom>
           <a:blipFill>
-            <a:blip r:embed="rId4">
+            <a:blip>
               <a:extLst>
                 <a:ext uri="{96DAC541-7B7A-43D3-8B79-37D633B846F1}">
-                  <asvg:svgBlip xmlns:asvg="http://schemas.microsoft.com/office/drawing/2016/SVG/main" xmlns="" r:embed="rId5"/>
+                  <asvg:svgBlip xmlns:asvg="http://schemas.microsoft.com/office/drawing/2016/SVG/main" r:embed="rId4"/>
                 </a:ext>
               </a:extLst>
             </a:blip>
@@ -6069,10 +7985,10 @@
             </a:pathLst>
           </a:custGeom>
           <a:blipFill>
-            <a:blip r:embed="rId4">
+            <a:blip>
               <a:extLst>
                 <a:ext uri="{96DAC541-7B7A-43D3-8B79-37D633B846F1}">
-                  <asvg:svgBlip xmlns:asvg="http://schemas.microsoft.com/office/drawing/2016/SVG/main" xmlns="" r:embed="rId5"/>
+                  <asvg:svgBlip xmlns:asvg="http://schemas.microsoft.com/office/drawing/2016/SVG/main" r:embed="rId4"/>
                 </a:ext>
               </a:extLst>
             </a:blip>
@@ -6203,10 +8119,10 @@
             </a:pathLst>
           </a:custGeom>
           <a:blipFill>
-            <a:blip r:embed="rId4">
+            <a:blip>
               <a:extLst>
                 <a:ext uri="{96DAC541-7B7A-43D3-8B79-37D633B846F1}">
-                  <asvg:svgBlip xmlns:asvg="http://schemas.microsoft.com/office/drawing/2016/SVG/main" xmlns="" r:embed="rId5"/>
+                  <asvg:svgBlip xmlns:asvg="http://schemas.microsoft.com/office/drawing/2016/SVG/main" r:embed="rId4"/>
                 </a:ext>
               </a:extLst>
             </a:blip>
@@ -6524,10 +8440,10 @@
             </a:pathLst>
           </a:custGeom>
           <a:blipFill>
-            <a:blip r:embed="rId3">
+            <a:blip>
               <a:extLst>
                 <a:ext uri="{96DAC541-7B7A-43D3-8B79-37D633B846F1}">
-                  <asvg:svgBlip xmlns:asvg="http://schemas.microsoft.com/office/drawing/2016/SVG/main" xmlns="" r:embed="rId4"/>
+                  <asvg:svgBlip xmlns:asvg="http://schemas.microsoft.com/office/drawing/2016/SVG/main" r:embed="rId3"/>
                 </a:ext>
               </a:extLst>
             </a:blip>
@@ -6658,10 +8574,10 @@
             </a:pathLst>
           </a:custGeom>
           <a:blipFill>
-            <a:blip r:embed="rId5">
+            <a:blip>
               <a:extLst>
                 <a:ext uri="{96DAC541-7B7A-43D3-8B79-37D633B846F1}">
-                  <asvg:svgBlip xmlns:asvg="http://schemas.microsoft.com/office/drawing/2016/SVG/main" xmlns="" r:embed="rId6"/>
+                  <asvg:svgBlip xmlns:asvg="http://schemas.microsoft.com/office/drawing/2016/SVG/main" r:embed="rId4"/>
                 </a:ext>
               </a:extLst>
             </a:blip>
@@ -6792,10 +8708,10 @@
             </a:pathLst>
           </a:custGeom>
           <a:blipFill>
-            <a:blip r:embed="rId7">
+            <a:blip>
               <a:extLst>
                 <a:ext uri="{96DAC541-7B7A-43D3-8B79-37D633B846F1}">
-                  <asvg:svgBlip xmlns:asvg="http://schemas.microsoft.com/office/drawing/2016/SVG/main" xmlns="" r:embed="rId8"/>
+                  <asvg:svgBlip xmlns:asvg="http://schemas.microsoft.com/office/drawing/2016/SVG/main" r:embed="rId5"/>
                 </a:ext>
               </a:extLst>
             </a:blip>
@@ -6926,10 +8842,10 @@
             </a:pathLst>
           </a:custGeom>
           <a:blipFill>
-            <a:blip r:embed="rId9">
+            <a:blip>
               <a:extLst>
                 <a:ext uri="{96DAC541-7B7A-43D3-8B79-37D633B846F1}">
-                  <asvg:svgBlip xmlns:asvg="http://schemas.microsoft.com/office/drawing/2016/SVG/main" xmlns="" r:embed="rId10"/>
+                  <asvg:svgBlip xmlns:asvg="http://schemas.microsoft.com/office/drawing/2016/SVG/main" r:embed="rId6"/>
                 </a:ext>
               </a:extLst>
             </a:blip>
@@ -7060,10 +8976,10 @@
             </a:pathLst>
           </a:custGeom>
           <a:blipFill>
-            <a:blip r:embed="rId11">
+            <a:blip>
               <a:extLst>
                 <a:ext uri="{96DAC541-7B7A-43D3-8B79-37D633B846F1}">
-                  <asvg:svgBlip xmlns:asvg="http://schemas.microsoft.com/office/drawing/2016/SVG/main" xmlns="" r:embed="rId12"/>
+                  <asvg:svgBlip xmlns:asvg="http://schemas.microsoft.com/office/drawing/2016/SVG/main" r:embed="rId7"/>
                 </a:ext>
               </a:extLst>
             </a:blip>
@@ -7208,7 +9124,7 @@
               </a:pathLst>
             </a:custGeom>
             <a:blipFill>
-              <a:blip r:embed="rId13"/>
+              <a:blip r:embed="rId8"/>
               <a:stretch>
                 <a:fillRect t="-50" b="-50"/>
               </a:stretch>
@@ -7712,7 +9628,7 @@
               </a:pathLst>
             </a:custGeom>
             <a:blipFill>
-              <a:blip r:embed="rId4" cstate="print">
+              <a:blip r:embed="rId4">
                 <a:alphaModFix amt="0"/>
               </a:blip>
               <a:stretch>
@@ -7975,7 +9891,7 @@
               </a:pathLst>
             </a:custGeom>
             <a:blipFill>
-              <a:blip r:embed="rId4" cstate="print">
+              <a:blip r:embed="rId4">
                 <a:alphaModFix amt="0"/>
               </a:blip>
               <a:stretch>
@@ -8238,7 +10154,7 @@
               </a:pathLst>
             </a:custGeom>
             <a:blipFill>
-              <a:blip r:embed="rId4" cstate="print">
+              <a:blip r:embed="rId4">
                 <a:alphaModFix amt="0"/>
               </a:blip>
               <a:stretch>
@@ -8501,7 +10417,7 @@
               </a:pathLst>
             </a:custGeom>
             <a:blipFill>
-              <a:blip r:embed="rId4" cstate="print">
+              <a:blip r:embed="rId4">
                 <a:alphaModFix amt="0"/>
               </a:blip>
               <a:stretch>
